--- a/John/PPT_Tugas_Serangan.pptx
+++ b/John/PPT_Tugas_Serangan.pptx
@@ -151,7 +151,7 @@
       </p:grpSpPr>
       <p:sp>
         <p:nvSpPr>
-          <p:cNvPr id="1314112993" name="Header Placeholder 1"/>
+          <p:cNvPr id="85023301" name="Header Placeholder 1"/>
           <p:cNvSpPr>
             <a:spLocks noGrp="1"/>
           </p:cNvSpPr>
@@ -185,7 +185,7 @@
       </p:sp>
       <p:sp>
         <p:nvSpPr>
-          <p:cNvPr id="271408825" name="Date Placeholder 2"/>
+          <p:cNvPr id="161541790" name="Date Placeholder 2"/>
           <p:cNvSpPr>
             <a:spLocks noGrp="1"/>
           </p:cNvSpPr>
@@ -223,7 +223,7 @@
       </p:sp>
       <p:sp>
         <p:nvSpPr>
-          <p:cNvPr id="17929280" name="Slide Image Placeholder 3"/>
+          <p:cNvPr id="345120856" name="Slide Image Placeholder 3"/>
           <p:cNvSpPr>
             <a:spLocks noChangeAspect="1" noGrp="1" noRot="1"/>
           </p:cNvSpPr>
@@ -259,7 +259,7 @@
       </p:sp>
       <p:sp>
         <p:nvSpPr>
-          <p:cNvPr id="1340810231" name="Notes Placeholder 4"/>
+          <p:cNvPr id="801292766" name="Notes Placeholder 4"/>
           <p:cNvSpPr>
             <a:spLocks noGrp="1"/>
           </p:cNvSpPr>
@@ -333,7 +333,7 @@
       </p:sp>
       <p:sp>
         <p:nvSpPr>
-          <p:cNvPr id="1022144878" name="Footer Placeholder 5"/>
+          <p:cNvPr id="2108825909" name="Footer Placeholder 5"/>
           <p:cNvSpPr>
             <a:spLocks noGrp="1"/>
           </p:cNvSpPr>
@@ -367,7 +367,7 @@
       </p:sp>
       <p:sp>
         <p:nvSpPr>
-          <p:cNvPr id="1657875857" name="Slide Number Placeholder 6"/>
+          <p:cNvPr id="1579282713" name="Slide Number Placeholder 6"/>
           <p:cNvSpPr>
             <a:spLocks noGrp="1"/>
           </p:cNvSpPr>
@@ -520,7 +520,7 @@
       </p:grpSpPr>
       <p:sp>
         <p:nvSpPr>
-          <p:cNvPr id="2079791053" name="Slide Image Placeholder 1"/>
+          <p:cNvPr id="898925565" name="Slide Image Placeholder 1"/>
           <p:cNvSpPr>
             <a:spLocks noChangeAspect="1" noGrp="1" noRot="1"/>
           </p:cNvSpPr>
@@ -537,7 +537,7 @@
       </p:sp>
       <p:sp>
         <p:nvSpPr>
-          <p:cNvPr id="297607139" name="Notes Placeholder 2"/>
+          <p:cNvPr id="1595486548" name="Notes Placeholder 2"/>
           <p:cNvSpPr>
             <a:spLocks noGrp="1"/>
           </p:cNvSpPr>
@@ -562,7 +562,7 @@
       </p:sp>
       <p:sp>
         <p:nvSpPr>
-          <p:cNvPr id="698493712" name="Slide Number Placeholder 3"/>
+          <p:cNvPr id="1118628340" name="Slide Number Placeholder 3"/>
           <p:cNvSpPr>
             <a:spLocks noGrp="1"/>
           </p:cNvSpPr>
@@ -613,7 +613,7 @@
       </p:grpSpPr>
       <p:sp>
         <p:nvSpPr>
-          <p:cNvPr id="85427133" name="Slide Image Placeholder 1"/>
+          <p:cNvPr id="46311003" name="Slide Image Placeholder 1"/>
           <p:cNvSpPr>
             <a:spLocks noChangeAspect="1" noGrp="1" noRot="1"/>
           </p:cNvSpPr>
@@ -630,7 +630,7 @@
       </p:sp>
       <p:sp>
         <p:nvSpPr>
-          <p:cNvPr id="1381283018" name="Notes Placeholder 2"/>
+          <p:cNvPr id="111118809" name="Notes Placeholder 2"/>
           <p:cNvSpPr>
             <a:spLocks noGrp="1"/>
           </p:cNvSpPr>
@@ -655,7 +655,7 @@
       </p:sp>
       <p:sp>
         <p:nvSpPr>
-          <p:cNvPr id="1674356339" name="Slide Number Placeholder 3"/>
+          <p:cNvPr id="1848659913" name="Slide Number Placeholder 3"/>
           <p:cNvSpPr>
             <a:spLocks noGrp="1"/>
           </p:cNvSpPr>
@@ -706,7 +706,7 @@
       </p:grpSpPr>
       <p:sp>
         <p:nvSpPr>
-          <p:cNvPr id="639434547" name="Slide Image Placeholder 1"/>
+          <p:cNvPr id="1518412263" name="Slide Image Placeholder 1"/>
           <p:cNvSpPr>
             <a:spLocks noChangeAspect="1" noGrp="1" noRot="1"/>
           </p:cNvSpPr>
@@ -723,7 +723,7 @@
       </p:sp>
       <p:sp>
         <p:nvSpPr>
-          <p:cNvPr id="684776177" name="Notes Placeholder 2"/>
+          <p:cNvPr id="1690541704" name="Notes Placeholder 2"/>
           <p:cNvSpPr>
             <a:spLocks noGrp="1"/>
           </p:cNvSpPr>
@@ -748,7 +748,7 @@
       </p:sp>
       <p:sp>
         <p:nvSpPr>
-          <p:cNvPr id="144043281" name="Slide Number Placeholder 3"/>
+          <p:cNvPr id="1619918691" name="Slide Number Placeholder 3"/>
           <p:cNvSpPr>
             <a:spLocks noGrp="1"/>
           </p:cNvSpPr>
@@ -799,7 +799,7 @@
       </p:grpSpPr>
       <p:sp>
         <p:nvSpPr>
-          <p:cNvPr id="2105212945" name="Slide Image Placeholder 1"/>
+          <p:cNvPr id="1476809629" name="Slide Image Placeholder 1"/>
           <p:cNvSpPr>
             <a:spLocks noChangeAspect="1" noGrp="1" noRot="1"/>
           </p:cNvSpPr>
@@ -816,7 +816,7 @@
       </p:sp>
       <p:sp>
         <p:nvSpPr>
-          <p:cNvPr id="841803169" name="Notes Placeholder 2"/>
+          <p:cNvPr id="1559852966" name="Notes Placeholder 2"/>
           <p:cNvSpPr>
             <a:spLocks noGrp="1"/>
           </p:cNvSpPr>
@@ -841,7 +841,7 @@
       </p:sp>
       <p:sp>
         <p:nvSpPr>
-          <p:cNvPr id="108060580" name="Slide Number Placeholder 3"/>
+          <p:cNvPr id="440443169" name="Slide Number Placeholder 3"/>
           <p:cNvSpPr>
             <a:spLocks noGrp="1"/>
           </p:cNvSpPr>
@@ -892,7 +892,7 @@
       </p:grpSpPr>
       <p:sp>
         <p:nvSpPr>
-          <p:cNvPr id="251185374" name="Slide Image Placeholder 1"/>
+          <p:cNvPr id="1476623028" name="Slide Image Placeholder 1"/>
           <p:cNvSpPr>
             <a:spLocks noChangeAspect="1" noGrp="1" noRot="1"/>
           </p:cNvSpPr>
@@ -909,7 +909,7 @@
       </p:sp>
       <p:sp>
         <p:nvSpPr>
-          <p:cNvPr id="1368288620" name="Notes Placeholder 2"/>
+          <p:cNvPr id="2009229007" name="Notes Placeholder 2"/>
           <p:cNvSpPr>
             <a:spLocks noGrp="1"/>
           </p:cNvSpPr>
@@ -934,7 +934,7 @@
       </p:sp>
       <p:sp>
         <p:nvSpPr>
-          <p:cNvPr id="525271208" name="Slide Number Placeholder 3"/>
+          <p:cNvPr id="1687084906" name="Slide Number Placeholder 3"/>
           <p:cNvSpPr>
             <a:spLocks noGrp="1"/>
           </p:cNvSpPr>
@@ -985,7 +985,7 @@
       </p:grpSpPr>
       <p:sp>
         <p:nvSpPr>
-          <p:cNvPr id="492335022" name="Slide Image Placeholder 1"/>
+          <p:cNvPr id="445182130" name="Slide Image Placeholder 1"/>
           <p:cNvSpPr>
             <a:spLocks noChangeAspect="1" noGrp="1" noRot="1"/>
           </p:cNvSpPr>
@@ -1002,7 +1002,7 @@
       </p:sp>
       <p:sp>
         <p:nvSpPr>
-          <p:cNvPr id="588191207" name="Notes Placeholder 2"/>
+          <p:cNvPr id="686267364" name="Notes Placeholder 2"/>
           <p:cNvSpPr>
             <a:spLocks noGrp="1"/>
           </p:cNvSpPr>
@@ -1027,7 +1027,7 @@
       </p:sp>
       <p:sp>
         <p:nvSpPr>
-          <p:cNvPr id="1411823118" name="Slide Number Placeholder 3"/>
+          <p:cNvPr id="1376195786" name="Slide Number Placeholder 3"/>
           <p:cNvSpPr>
             <a:spLocks noGrp="1"/>
           </p:cNvSpPr>
@@ -1078,7 +1078,7 @@
       </p:grpSpPr>
       <p:sp>
         <p:nvSpPr>
-          <p:cNvPr id="295816030" name="Slide Image Placeholder 1"/>
+          <p:cNvPr id="206454058" name="Slide Image Placeholder 1"/>
           <p:cNvSpPr>
             <a:spLocks noChangeAspect="1" noGrp="1" noRot="1"/>
           </p:cNvSpPr>
@@ -1095,7 +1095,7 @@
       </p:sp>
       <p:sp>
         <p:nvSpPr>
-          <p:cNvPr id="1798502803" name="Notes Placeholder 2"/>
+          <p:cNvPr id="1507289425" name="Notes Placeholder 2"/>
           <p:cNvSpPr>
             <a:spLocks noGrp="1"/>
           </p:cNvSpPr>
@@ -1120,7 +1120,7 @@
       </p:sp>
       <p:sp>
         <p:nvSpPr>
-          <p:cNvPr id="285629920" name="Slide Number Placeholder 3"/>
+          <p:cNvPr id="2086128938" name="Slide Number Placeholder 3"/>
           <p:cNvSpPr>
             <a:spLocks noGrp="1"/>
           </p:cNvSpPr>
@@ -1171,7 +1171,7 @@
       </p:grpSpPr>
       <p:sp>
         <p:nvSpPr>
-          <p:cNvPr id="1789573189" name="Slide Image Placeholder 1"/>
+          <p:cNvPr id="1100172978" name="Slide Image Placeholder 1"/>
           <p:cNvSpPr>
             <a:spLocks noChangeAspect="1" noGrp="1" noRot="1"/>
           </p:cNvSpPr>
@@ -1188,7 +1188,7 @@
       </p:sp>
       <p:sp>
         <p:nvSpPr>
-          <p:cNvPr id="1588635425" name="Notes Placeholder 2"/>
+          <p:cNvPr id="89019378" name="Notes Placeholder 2"/>
           <p:cNvSpPr>
             <a:spLocks noGrp="1"/>
           </p:cNvSpPr>
@@ -1213,7 +1213,7 @@
       </p:sp>
       <p:sp>
         <p:nvSpPr>
-          <p:cNvPr id="51019954" name="Slide Number Placeholder 3"/>
+          <p:cNvPr id="835321523" name="Slide Number Placeholder 3"/>
           <p:cNvSpPr>
             <a:spLocks noGrp="1"/>
           </p:cNvSpPr>
@@ -1264,7 +1264,7 @@
       </p:grpSpPr>
       <p:sp>
         <p:nvSpPr>
-          <p:cNvPr id="1251170513" name="Slide Image Placeholder 1"/>
+          <p:cNvPr id="1205092767" name="Slide Image Placeholder 1"/>
           <p:cNvSpPr>
             <a:spLocks noChangeAspect="1" noGrp="1" noRot="1"/>
           </p:cNvSpPr>
@@ -1281,7 +1281,7 @@
       </p:sp>
       <p:sp>
         <p:nvSpPr>
-          <p:cNvPr id="863308855" name="Notes Placeholder 2"/>
+          <p:cNvPr id="327784217" name="Notes Placeholder 2"/>
           <p:cNvSpPr>
             <a:spLocks noGrp="1"/>
           </p:cNvSpPr>
@@ -1306,7 +1306,7 @@
       </p:sp>
       <p:sp>
         <p:nvSpPr>
-          <p:cNvPr id="38475936" name="Slide Number Placeholder 3"/>
+          <p:cNvPr id="90671264" name="Slide Number Placeholder 3"/>
           <p:cNvSpPr>
             <a:spLocks noGrp="1"/>
           </p:cNvSpPr>
@@ -1357,7 +1357,7 @@
       </p:grpSpPr>
       <p:sp>
         <p:nvSpPr>
-          <p:cNvPr id="830867146" name="Slide Image Placeholder 1"/>
+          <p:cNvPr id="1708576770" name="Slide Image Placeholder 1"/>
           <p:cNvSpPr>
             <a:spLocks noChangeAspect="1" noGrp="1" noRot="1"/>
           </p:cNvSpPr>
@@ -1374,7 +1374,7 @@
       </p:sp>
       <p:sp>
         <p:nvSpPr>
-          <p:cNvPr id="1116346907" name="Notes Placeholder 2"/>
+          <p:cNvPr id="1041760564" name="Notes Placeholder 2"/>
           <p:cNvSpPr>
             <a:spLocks noGrp="1"/>
           </p:cNvSpPr>
@@ -1399,7 +1399,7 @@
       </p:sp>
       <p:sp>
         <p:nvSpPr>
-          <p:cNvPr id="1173497184" name="Slide Number Placeholder 3"/>
+          <p:cNvPr id="263325604" name="Slide Number Placeholder 3"/>
           <p:cNvSpPr>
             <a:spLocks noGrp="1"/>
           </p:cNvSpPr>
@@ -1450,7 +1450,7 @@
       </p:grpSpPr>
       <p:sp>
         <p:nvSpPr>
-          <p:cNvPr id="65586474" name="Slide Image Placeholder 1"/>
+          <p:cNvPr id="1270503575" name="Slide Image Placeholder 1"/>
           <p:cNvSpPr>
             <a:spLocks noChangeAspect="1" noGrp="1" noRot="1"/>
           </p:cNvSpPr>
@@ -1467,7 +1467,7 @@
       </p:sp>
       <p:sp>
         <p:nvSpPr>
-          <p:cNvPr id="965138362" name="Notes Placeholder 2"/>
+          <p:cNvPr id="96960386" name="Notes Placeholder 2"/>
           <p:cNvSpPr>
             <a:spLocks noGrp="1"/>
           </p:cNvSpPr>
@@ -1492,7 +1492,7 @@
       </p:sp>
       <p:sp>
         <p:nvSpPr>
-          <p:cNvPr id="954972008" name="Slide Number Placeholder 3"/>
+          <p:cNvPr id="139645098" name="Slide Number Placeholder 3"/>
           <p:cNvSpPr>
             <a:spLocks noGrp="1"/>
           </p:cNvSpPr>
@@ -1543,7 +1543,7 @@
       </p:grpSpPr>
       <p:sp>
         <p:nvSpPr>
-          <p:cNvPr id="706198303" name="Slide Image Placeholder 1"/>
+          <p:cNvPr id="598206484" name="Slide Image Placeholder 1"/>
           <p:cNvSpPr>
             <a:spLocks noChangeAspect="1" noGrp="1" noRot="1"/>
           </p:cNvSpPr>
@@ -1560,7 +1560,7 @@
       </p:sp>
       <p:sp>
         <p:nvSpPr>
-          <p:cNvPr id="1732142588" name="Notes Placeholder 2"/>
+          <p:cNvPr id="77511166" name="Notes Placeholder 2"/>
           <p:cNvSpPr>
             <a:spLocks noGrp="1"/>
           </p:cNvSpPr>
@@ -1585,7 +1585,7 @@
       </p:sp>
       <p:sp>
         <p:nvSpPr>
-          <p:cNvPr id="866103699" name="Slide Number Placeholder 3"/>
+          <p:cNvPr id="2050689970" name="Slide Number Placeholder 3"/>
           <p:cNvSpPr>
             <a:spLocks noGrp="1"/>
           </p:cNvSpPr>
@@ -1636,7 +1636,7 @@
       </p:grpSpPr>
       <p:sp>
         <p:nvSpPr>
-          <p:cNvPr id="815944622" name="Slide Image Placeholder 1"/>
+          <p:cNvPr id="2120712201" name="Slide Image Placeholder 1"/>
           <p:cNvSpPr>
             <a:spLocks noChangeAspect="1" noGrp="1" noRot="1"/>
           </p:cNvSpPr>
@@ -1653,7 +1653,7 @@
       </p:sp>
       <p:sp>
         <p:nvSpPr>
-          <p:cNvPr id="1530024065" name="Notes Placeholder 2"/>
+          <p:cNvPr id="390071388" name="Notes Placeholder 2"/>
           <p:cNvSpPr>
             <a:spLocks noGrp="1"/>
           </p:cNvSpPr>
@@ -1678,7 +1678,7 @@
       </p:sp>
       <p:sp>
         <p:nvSpPr>
-          <p:cNvPr id="642645952" name="Slide Number Placeholder 3"/>
+          <p:cNvPr id="1183488990" name="Slide Number Placeholder 3"/>
           <p:cNvSpPr>
             <a:spLocks noGrp="1"/>
           </p:cNvSpPr>
@@ -1729,7 +1729,7 @@
       </p:grpSpPr>
       <p:sp>
         <p:nvSpPr>
-          <p:cNvPr id="1234566468" name="Slide Image Placeholder 1"/>
+          <p:cNvPr id="1027434615" name="Slide Image Placeholder 1"/>
           <p:cNvSpPr>
             <a:spLocks noChangeAspect="1" noGrp="1" noRot="1"/>
           </p:cNvSpPr>
@@ -1746,7 +1746,7 @@
       </p:sp>
       <p:sp>
         <p:nvSpPr>
-          <p:cNvPr id="2009572224" name="Notes Placeholder 2"/>
+          <p:cNvPr id="429438850" name="Notes Placeholder 2"/>
           <p:cNvSpPr>
             <a:spLocks noGrp="1"/>
           </p:cNvSpPr>
@@ -1771,7 +1771,7 @@
       </p:sp>
       <p:sp>
         <p:nvSpPr>
-          <p:cNvPr id="1461967448" name="Slide Number Placeholder 3"/>
+          <p:cNvPr id="294465911" name="Slide Number Placeholder 3"/>
           <p:cNvSpPr>
             <a:spLocks noGrp="1"/>
           </p:cNvSpPr>
@@ -1822,7 +1822,7 @@
       </p:grpSpPr>
       <p:sp>
         <p:nvSpPr>
-          <p:cNvPr id="1427586727" name="Slide Image Placeholder 1"/>
+          <p:cNvPr id="1251258249" name="Slide Image Placeholder 1"/>
           <p:cNvSpPr>
             <a:spLocks noChangeAspect="1" noGrp="1" noRot="1"/>
           </p:cNvSpPr>
@@ -1839,7 +1839,7 @@
       </p:sp>
       <p:sp>
         <p:nvSpPr>
-          <p:cNvPr id="1000954401" name="Notes Placeholder 2"/>
+          <p:cNvPr id="2011432175" name="Notes Placeholder 2"/>
           <p:cNvSpPr>
             <a:spLocks noGrp="1"/>
           </p:cNvSpPr>
@@ -1864,7 +1864,7 @@
       </p:sp>
       <p:sp>
         <p:nvSpPr>
-          <p:cNvPr id="201119947" name="Slide Number Placeholder 3"/>
+          <p:cNvPr id="1680486052" name="Slide Number Placeholder 3"/>
           <p:cNvSpPr>
             <a:spLocks noGrp="1"/>
           </p:cNvSpPr>
@@ -1915,7 +1915,7 @@
       </p:grpSpPr>
       <p:sp>
         <p:nvSpPr>
-          <p:cNvPr id="2133012634" name="Slide Image Placeholder 1"/>
+          <p:cNvPr id="182984573" name="Slide Image Placeholder 1"/>
           <p:cNvSpPr>
             <a:spLocks noChangeAspect="1" noGrp="1" noRot="1"/>
           </p:cNvSpPr>
@@ -1932,7 +1932,7 @@
       </p:sp>
       <p:sp>
         <p:nvSpPr>
-          <p:cNvPr id="520747207" name="Notes Placeholder 2"/>
+          <p:cNvPr id="99909917" name="Notes Placeholder 2"/>
           <p:cNvSpPr>
             <a:spLocks noGrp="1"/>
           </p:cNvSpPr>
@@ -1957,7 +1957,7 @@
       </p:sp>
       <p:sp>
         <p:nvSpPr>
-          <p:cNvPr id="1184301590" name="Slide Number Placeholder 3"/>
+          <p:cNvPr id="1957746537" name="Slide Number Placeholder 3"/>
           <p:cNvSpPr>
             <a:spLocks noGrp="1"/>
           </p:cNvSpPr>
@@ -2008,7 +2008,7 @@
       </p:grpSpPr>
       <p:sp>
         <p:nvSpPr>
-          <p:cNvPr id="1937303501" name="Slide Image Placeholder 1"/>
+          <p:cNvPr id="558675433" name="Slide Image Placeholder 1"/>
           <p:cNvSpPr>
             <a:spLocks noChangeAspect="1" noGrp="1" noRot="1"/>
           </p:cNvSpPr>
@@ -2025,7 +2025,7 @@
       </p:sp>
       <p:sp>
         <p:nvSpPr>
-          <p:cNvPr id="1308929161" name="Notes Placeholder 2"/>
+          <p:cNvPr id="1463028124" name="Notes Placeholder 2"/>
           <p:cNvSpPr>
             <a:spLocks noGrp="1"/>
           </p:cNvSpPr>
@@ -2050,7 +2050,7 @@
       </p:sp>
       <p:sp>
         <p:nvSpPr>
-          <p:cNvPr id="565550691" name="Slide Number Placeholder 3"/>
+          <p:cNvPr id="1088387096" name="Slide Number Placeholder 3"/>
           <p:cNvSpPr>
             <a:spLocks noGrp="1"/>
           </p:cNvSpPr>
@@ -2101,7 +2101,7 @@
       </p:grpSpPr>
       <p:sp>
         <p:nvSpPr>
-          <p:cNvPr id="303982850" name="Slide Image Placeholder 1"/>
+          <p:cNvPr id="48271317" name="Slide Image Placeholder 1"/>
           <p:cNvSpPr>
             <a:spLocks noChangeAspect="1" noGrp="1" noRot="1"/>
           </p:cNvSpPr>
@@ -2118,7 +2118,7 @@
       </p:sp>
       <p:sp>
         <p:nvSpPr>
-          <p:cNvPr id="1431670353" name="Notes Placeholder 2"/>
+          <p:cNvPr id="1860715138" name="Notes Placeholder 2"/>
           <p:cNvSpPr>
             <a:spLocks noGrp="1"/>
           </p:cNvSpPr>
@@ -2143,7 +2143,7 @@
       </p:sp>
       <p:sp>
         <p:nvSpPr>
-          <p:cNvPr id="772119087" name="Slide Number Placeholder 3"/>
+          <p:cNvPr id="151943493" name="Slide Number Placeholder 3"/>
           <p:cNvSpPr>
             <a:spLocks noGrp="1"/>
           </p:cNvSpPr>
@@ -2194,7 +2194,7 @@
       </p:grpSpPr>
       <p:sp>
         <p:nvSpPr>
-          <p:cNvPr id="1212479498" name="Title 1"/>
+          <p:cNvPr id="1967792324" name="Title 1"/>
           <p:cNvSpPr>
             <a:spLocks noGrp="1"/>
           </p:cNvSpPr>
@@ -2229,7 +2229,7 @@
       </p:sp>
       <p:sp>
         <p:nvSpPr>
-          <p:cNvPr id="2039523941" name="Subtitle 2"/>
+          <p:cNvPr id="479487022" name="Subtitle 2"/>
           <p:cNvSpPr>
             <a:spLocks noGrp="1"/>
           </p:cNvSpPr>
@@ -2297,7 +2297,7 @@
       </p:sp>
       <p:sp>
         <p:nvSpPr>
-          <p:cNvPr id="1203773482" name="Date Placeholder 3"/>
+          <p:cNvPr id="377289858" name="Date Placeholder 3"/>
           <p:cNvSpPr>
             <a:spLocks noGrp="1"/>
           </p:cNvSpPr>
@@ -2323,7 +2323,7 @@
       </p:sp>
       <p:sp>
         <p:nvSpPr>
-          <p:cNvPr id="1434380520" name="Footer Placeholder 4"/>
+          <p:cNvPr id="1436861287" name="Footer Placeholder 4"/>
           <p:cNvSpPr>
             <a:spLocks noGrp="1"/>
           </p:cNvSpPr>
@@ -2345,7 +2345,7 @@
       </p:sp>
       <p:sp>
         <p:nvSpPr>
-          <p:cNvPr id="646097916" name="Slide Number Placeholder 5"/>
+          <p:cNvPr id="56482044" name="Slide Number Placeholder 5"/>
           <p:cNvSpPr>
             <a:spLocks noGrp="1"/>
           </p:cNvSpPr>
@@ -2396,7 +2396,7 @@
       </p:grpSpPr>
       <p:sp>
         <p:nvSpPr>
-          <p:cNvPr id="1258578974" name="Title 1"/>
+          <p:cNvPr id="1053350289" name="Title 1"/>
           <p:cNvSpPr>
             <a:spLocks noGrp="1"/>
           </p:cNvSpPr>
@@ -2422,7 +2422,7 @@
       </p:sp>
       <p:sp>
         <p:nvSpPr>
-          <p:cNvPr id="1435876241" name="Vertical Text Placeholder 2"/>
+          <p:cNvPr id="446471938" name="Vertical Text Placeholder 2"/>
           <p:cNvSpPr>
             <a:spLocks noGrp="1"/>
           </p:cNvSpPr>
@@ -2488,7 +2488,7 @@
       </p:sp>
       <p:sp>
         <p:nvSpPr>
-          <p:cNvPr id="985072926" name="Date Placeholder 3"/>
+          <p:cNvPr id="1380116207" name="Date Placeholder 3"/>
           <p:cNvSpPr>
             <a:spLocks noGrp="1"/>
           </p:cNvSpPr>
@@ -2514,7 +2514,7 @@
       </p:sp>
       <p:sp>
         <p:nvSpPr>
-          <p:cNvPr id="1452182436" name="Footer Placeholder 4"/>
+          <p:cNvPr id="118260073" name="Footer Placeholder 4"/>
           <p:cNvSpPr>
             <a:spLocks noGrp="1"/>
           </p:cNvSpPr>
@@ -2536,7 +2536,7 @@
       </p:sp>
       <p:sp>
         <p:nvSpPr>
-          <p:cNvPr id="793326393" name="Slide Number Placeholder 5"/>
+          <p:cNvPr id="677450989" name="Slide Number Placeholder 5"/>
           <p:cNvSpPr>
             <a:spLocks noGrp="1"/>
           </p:cNvSpPr>
@@ -2587,7 +2587,7 @@
       </p:grpSpPr>
       <p:sp>
         <p:nvSpPr>
-          <p:cNvPr id="1792375899" name="Vertical Title 1"/>
+          <p:cNvPr id="557510931" name="Vertical Title 1"/>
           <p:cNvSpPr>
             <a:spLocks noGrp="1"/>
           </p:cNvSpPr>
@@ -2618,7 +2618,7 @@
       </p:sp>
       <p:sp>
         <p:nvSpPr>
-          <p:cNvPr id="1896105097" name="Vertical Text Placeholder 2"/>
+          <p:cNvPr id="1746756279" name="Vertical Text Placeholder 2"/>
           <p:cNvSpPr>
             <a:spLocks noGrp="1"/>
           </p:cNvSpPr>
@@ -2689,7 +2689,7 @@
       </p:sp>
       <p:sp>
         <p:nvSpPr>
-          <p:cNvPr id="406789914" name="Date Placeholder 3"/>
+          <p:cNvPr id="1292965742" name="Date Placeholder 3"/>
           <p:cNvSpPr>
             <a:spLocks noGrp="1"/>
           </p:cNvSpPr>
@@ -2715,7 +2715,7 @@
       </p:sp>
       <p:sp>
         <p:nvSpPr>
-          <p:cNvPr id="783820435" name="Footer Placeholder 4"/>
+          <p:cNvPr id="798211710" name="Footer Placeholder 4"/>
           <p:cNvSpPr>
             <a:spLocks noGrp="1"/>
           </p:cNvSpPr>
@@ -2737,7 +2737,7 @@
       </p:sp>
       <p:sp>
         <p:nvSpPr>
-          <p:cNvPr id="779320584" name="Slide Number Placeholder 5"/>
+          <p:cNvPr id="1526514624" name="Slide Number Placeholder 5"/>
           <p:cNvSpPr>
             <a:spLocks noGrp="1"/>
           </p:cNvSpPr>
@@ -2788,7 +2788,7 @@
       </p:grpSpPr>
       <p:sp>
         <p:nvSpPr>
-          <p:cNvPr id="1943854227" name="Title 1"/>
+          <p:cNvPr id="1376269107" name="Title 1"/>
           <p:cNvSpPr>
             <a:spLocks noGrp="1"/>
           </p:cNvSpPr>
@@ -2814,7 +2814,7 @@
       </p:sp>
       <p:sp>
         <p:nvSpPr>
-          <p:cNvPr id="179989899" name="Content Placeholder 2"/>
+          <p:cNvPr id="1305287849" name="Content Placeholder 2"/>
           <p:cNvSpPr>
             <a:spLocks noGrp="1"/>
           </p:cNvSpPr>
@@ -2880,7 +2880,7 @@
       </p:sp>
       <p:sp>
         <p:nvSpPr>
-          <p:cNvPr id="586244714" name="Date Placeholder 3"/>
+          <p:cNvPr id="343596020" name="Date Placeholder 3"/>
           <p:cNvSpPr>
             <a:spLocks noGrp="1"/>
           </p:cNvSpPr>
@@ -2906,7 +2906,7 @@
       </p:sp>
       <p:sp>
         <p:nvSpPr>
-          <p:cNvPr id="1315535224" name="Footer Placeholder 4"/>
+          <p:cNvPr id="1837122261" name="Footer Placeholder 4"/>
           <p:cNvSpPr>
             <a:spLocks noGrp="1"/>
           </p:cNvSpPr>
@@ -2928,7 +2928,7 @@
       </p:sp>
       <p:sp>
         <p:nvSpPr>
-          <p:cNvPr id="801905537" name="Slide Number Placeholder 5"/>
+          <p:cNvPr id="1574212194" name="Slide Number Placeholder 5"/>
           <p:cNvSpPr>
             <a:spLocks noGrp="1"/>
           </p:cNvSpPr>
@@ -2979,7 +2979,7 @@
       </p:grpSpPr>
       <p:sp>
         <p:nvSpPr>
-          <p:cNvPr id="122219516" name="Title 1"/>
+          <p:cNvPr id="1474065158" name="Title 1"/>
           <p:cNvSpPr>
             <a:spLocks noGrp="1"/>
           </p:cNvSpPr>
@@ -3014,7 +3014,7 @@
       </p:sp>
       <p:sp>
         <p:nvSpPr>
-          <p:cNvPr id="719551993" name="Text Placeholder 2"/>
+          <p:cNvPr id="1200345099" name="Text Placeholder 2"/>
           <p:cNvSpPr>
             <a:spLocks noGrp="1"/>
           </p:cNvSpPr>
@@ -3136,7 +3136,7 @@
       </p:sp>
       <p:sp>
         <p:nvSpPr>
-          <p:cNvPr id="2042823142" name="Date Placeholder 3"/>
+          <p:cNvPr id="664983526" name="Date Placeholder 3"/>
           <p:cNvSpPr>
             <a:spLocks noGrp="1"/>
           </p:cNvSpPr>
@@ -3162,7 +3162,7 @@
       </p:sp>
       <p:sp>
         <p:nvSpPr>
-          <p:cNvPr id="1328727513" name="Footer Placeholder 4"/>
+          <p:cNvPr id="2058385103" name="Footer Placeholder 4"/>
           <p:cNvSpPr>
             <a:spLocks noGrp="1"/>
           </p:cNvSpPr>
@@ -3184,7 +3184,7 @@
       </p:sp>
       <p:sp>
         <p:nvSpPr>
-          <p:cNvPr id="1121699680" name="Slide Number Placeholder 5"/>
+          <p:cNvPr id="1005395758" name="Slide Number Placeholder 5"/>
           <p:cNvSpPr>
             <a:spLocks noGrp="1"/>
           </p:cNvSpPr>
@@ -3235,7 +3235,7 @@
       </p:grpSpPr>
       <p:sp>
         <p:nvSpPr>
-          <p:cNvPr id="1397430340" name="Title 1"/>
+          <p:cNvPr id="1641834733" name="Title 1"/>
           <p:cNvSpPr>
             <a:spLocks noGrp="1"/>
           </p:cNvSpPr>
@@ -3261,7 +3261,7 @@
       </p:sp>
       <p:sp>
         <p:nvSpPr>
-          <p:cNvPr id="1220679442" name="Content Placeholder 2"/>
+          <p:cNvPr id="1968927712" name="Content Placeholder 2"/>
           <p:cNvSpPr>
             <a:spLocks noGrp="1"/>
           </p:cNvSpPr>
@@ -3332,7 +3332,7 @@
       </p:sp>
       <p:sp>
         <p:nvSpPr>
-          <p:cNvPr id="1208589301" name="Content Placeholder 3"/>
+          <p:cNvPr id="1516110586" name="Content Placeholder 3"/>
           <p:cNvSpPr>
             <a:spLocks noGrp="1"/>
           </p:cNvSpPr>
@@ -3403,7 +3403,7 @@
       </p:sp>
       <p:sp>
         <p:nvSpPr>
-          <p:cNvPr id="163207545" name="Date Placeholder 4"/>
+          <p:cNvPr id="932427405" name="Date Placeholder 4"/>
           <p:cNvSpPr>
             <a:spLocks noGrp="1"/>
           </p:cNvSpPr>
@@ -3429,7 +3429,7 @@
       </p:sp>
       <p:sp>
         <p:nvSpPr>
-          <p:cNvPr id="324134055" name="Footer Placeholder 5"/>
+          <p:cNvPr id="171967655" name="Footer Placeholder 5"/>
           <p:cNvSpPr>
             <a:spLocks noGrp="1"/>
           </p:cNvSpPr>
@@ -3451,7 +3451,7 @@
       </p:sp>
       <p:sp>
         <p:nvSpPr>
-          <p:cNvPr id="556166210" name="Slide Number Placeholder 6"/>
+          <p:cNvPr id="1200210131" name="Slide Number Placeholder 6"/>
           <p:cNvSpPr>
             <a:spLocks noGrp="1"/>
           </p:cNvSpPr>
@@ -3502,7 +3502,7 @@
       </p:grpSpPr>
       <p:sp>
         <p:nvSpPr>
-          <p:cNvPr id="595625026" name="Title 1"/>
+          <p:cNvPr id="160260106" name="Title 1"/>
           <p:cNvSpPr>
             <a:spLocks noGrp="1"/>
           </p:cNvSpPr>
@@ -3533,7 +3533,7 @@
       </p:sp>
       <p:sp>
         <p:nvSpPr>
-          <p:cNvPr id="1739073540" name="Text Placeholder 2"/>
+          <p:cNvPr id="1305788247" name="Text Placeholder 2"/>
           <p:cNvSpPr>
             <a:spLocks noGrp="1"/>
           </p:cNvSpPr>
@@ -3601,7 +3601,7 @@
       </p:sp>
       <p:sp>
         <p:nvSpPr>
-          <p:cNvPr id="1458767555" name="Content Placeholder 3"/>
+          <p:cNvPr id="165821912" name="Content Placeholder 3"/>
           <p:cNvSpPr>
             <a:spLocks noGrp="1"/>
           </p:cNvSpPr>
@@ -3672,7 +3672,7 @@
       </p:sp>
       <p:sp>
         <p:nvSpPr>
-          <p:cNvPr id="2021111995" name="Text Placeholder 4"/>
+          <p:cNvPr id="2082871531" name="Text Placeholder 4"/>
           <p:cNvSpPr>
             <a:spLocks noGrp="1"/>
           </p:cNvSpPr>
@@ -3740,7 +3740,7 @@
       </p:sp>
       <p:sp>
         <p:nvSpPr>
-          <p:cNvPr id="1903389586" name="Content Placeholder 5"/>
+          <p:cNvPr id="220753708" name="Content Placeholder 5"/>
           <p:cNvSpPr>
             <a:spLocks noGrp="1"/>
           </p:cNvSpPr>
@@ -3811,7 +3811,7 @@
       </p:sp>
       <p:sp>
         <p:nvSpPr>
-          <p:cNvPr id="571653471" name="Date Placeholder 6"/>
+          <p:cNvPr id="34737799" name="Date Placeholder 6"/>
           <p:cNvSpPr>
             <a:spLocks noGrp="1"/>
           </p:cNvSpPr>
@@ -3837,7 +3837,7 @@
       </p:sp>
       <p:sp>
         <p:nvSpPr>
-          <p:cNvPr id="1526721638" name="Footer Placeholder 7"/>
+          <p:cNvPr id="1364202917" name="Footer Placeholder 7"/>
           <p:cNvSpPr>
             <a:spLocks noGrp="1"/>
           </p:cNvSpPr>
@@ -3859,7 +3859,7 @@
       </p:sp>
       <p:sp>
         <p:nvSpPr>
-          <p:cNvPr id="1500879114" name="Slide Number Placeholder 8"/>
+          <p:cNvPr id="175030408" name="Slide Number Placeholder 8"/>
           <p:cNvSpPr>
             <a:spLocks noGrp="1"/>
           </p:cNvSpPr>
@@ -3910,7 +3910,7 @@
       </p:grpSpPr>
       <p:sp>
         <p:nvSpPr>
-          <p:cNvPr id="1001805152" name="Title 1"/>
+          <p:cNvPr id="705596701" name="Title 1"/>
           <p:cNvSpPr>
             <a:spLocks noGrp="1"/>
           </p:cNvSpPr>
@@ -3936,7 +3936,7 @@
       </p:sp>
       <p:sp>
         <p:nvSpPr>
-          <p:cNvPr id="823359931" name="Date Placeholder 2"/>
+          <p:cNvPr id="1219370069" name="Date Placeholder 2"/>
           <p:cNvSpPr>
             <a:spLocks noGrp="1"/>
           </p:cNvSpPr>
@@ -3962,7 +3962,7 @@
       </p:sp>
       <p:sp>
         <p:nvSpPr>
-          <p:cNvPr id="1558957418" name="Footer Placeholder 3"/>
+          <p:cNvPr id="1449020994" name="Footer Placeholder 3"/>
           <p:cNvSpPr>
             <a:spLocks noGrp="1"/>
           </p:cNvSpPr>
@@ -3984,7 +3984,7 @@
       </p:sp>
       <p:sp>
         <p:nvSpPr>
-          <p:cNvPr id="655290908" name="Slide Number Placeholder 4"/>
+          <p:cNvPr id="238464029" name="Slide Number Placeholder 4"/>
           <p:cNvSpPr>
             <a:spLocks noGrp="1"/>
           </p:cNvSpPr>
@@ -4035,7 +4035,7 @@
       </p:grpSpPr>
       <p:sp>
         <p:nvSpPr>
-          <p:cNvPr id="1656114043" name="Date Placeholder 1"/>
+          <p:cNvPr id="219250729" name="Date Placeholder 1"/>
           <p:cNvSpPr>
             <a:spLocks noGrp="1"/>
           </p:cNvSpPr>
@@ -4061,7 +4061,7 @@
       </p:sp>
       <p:sp>
         <p:nvSpPr>
-          <p:cNvPr id="1691110713" name="Footer Placeholder 2"/>
+          <p:cNvPr id="1506803403" name="Footer Placeholder 2"/>
           <p:cNvSpPr>
             <a:spLocks noGrp="1"/>
           </p:cNvSpPr>
@@ -4083,7 +4083,7 @@
       </p:sp>
       <p:sp>
         <p:nvSpPr>
-          <p:cNvPr id="214722381" name="Slide Number Placeholder 3"/>
+          <p:cNvPr id="567009947" name="Slide Number Placeholder 3"/>
           <p:cNvSpPr>
             <a:spLocks noGrp="1"/>
           </p:cNvSpPr>
@@ -4134,7 +4134,7 @@
       </p:grpSpPr>
       <p:sp>
         <p:nvSpPr>
-          <p:cNvPr id="388352125" name="Title 1"/>
+          <p:cNvPr id="77095995" name="Title 1"/>
           <p:cNvSpPr>
             <a:spLocks noGrp="1"/>
           </p:cNvSpPr>
@@ -4169,7 +4169,7 @@
       </p:sp>
       <p:sp>
         <p:nvSpPr>
-          <p:cNvPr id="813108688" name="Content Placeholder 2"/>
+          <p:cNvPr id="662794830" name="Content Placeholder 2"/>
           <p:cNvSpPr>
             <a:spLocks noGrp="1"/>
           </p:cNvSpPr>
@@ -4268,7 +4268,7 @@
       </p:sp>
       <p:sp>
         <p:nvSpPr>
-          <p:cNvPr id="1807436221" name="Text Placeholder 3"/>
+          <p:cNvPr id="992050786" name="Text Placeholder 3"/>
           <p:cNvSpPr>
             <a:spLocks noGrp="1"/>
           </p:cNvSpPr>
@@ -4336,7 +4336,7 @@
       </p:sp>
       <p:sp>
         <p:nvSpPr>
-          <p:cNvPr id="1797877035" name="Date Placeholder 4"/>
+          <p:cNvPr id="119100546" name="Date Placeholder 4"/>
           <p:cNvSpPr>
             <a:spLocks noGrp="1"/>
           </p:cNvSpPr>
@@ -4362,7 +4362,7 @@
       </p:sp>
       <p:sp>
         <p:nvSpPr>
-          <p:cNvPr id="1727826886" name="Footer Placeholder 5"/>
+          <p:cNvPr id="2049453129" name="Footer Placeholder 5"/>
           <p:cNvSpPr>
             <a:spLocks noGrp="1"/>
           </p:cNvSpPr>
@@ -4384,7 +4384,7 @@
       </p:sp>
       <p:sp>
         <p:nvSpPr>
-          <p:cNvPr id="282802318" name="Slide Number Placeholder 6"/>
+          <p:cNvPr id="1150891220" name="Slide Number Placeholder 6"/>
           <p:cNvSpPr>
             <a:spLocks noGrp="1"/>
           </p:cNvSpPr>
@@ -4435,7 +4435,7 @@
       </p:grpSpPr>
       <p:sp>
         <p:nvSpPr>
-          <p:cNvPr id="518498959" name="Title 1"/>
+          <p:cNvPr id="2025510283" name="Title 1"/>
           <p:cNvSpPr>
             <a:spLocks noGrp="1"/>
           </p:cNvSpPr>
@@ -4470,7 +4470,7 @@
       </p:sp>
       <p:sp>
         <p:nvSpPr>
-          <p:cNvPr id="406079076" name="Picture Placeholder 2"/>
+          <p:cNvPr id="1183542840" name="Picture Placeholder 2"/>
           <p:cNvSpPr>
             <a:spLocks noChangeAspect="1" noGrp="1"/>
           </p:cNvSpPr>
@@ -4538,7 +4538,7 @@
       </p:sp>
       <p:sp>
         <p:nvSpPr>
-          <p:cNvPr id="1822212916" name="Text Placeholder 3"/>
+          <p:cNvPr id="262584924" name="Text Placeholder 3"/>
           <p:cNvSpPr>
             <a:spLocks noGrp="1"/>
           </p:cNvSpPr>
@@ -4606,7 +4606,7 @@
       </p:sp>
       <p:sp>
         <p:nvSpPr>
-          <p:cNvPr id="818864404" name="Date Placeholder 4"/>
+          <p:cNvPr id="558307539" name="Date Placeholder 4"/>
           <p:cNvSpPr>
             <a:spLocks noGrp="1"/>
           </p:cNvSpPr>
@@ -4632,7 +4632,7 @@
       </p:sp>
       <p:sp>
         <p:nvSpPr>
-          <p:cNvPr id="2121776089" name="Footer Placeholder 5"/>
+          <p:cNvPr id="1853069863" name="Footer Placeholder 5"/>
           <p:cNvSpPr>
             <a:spLocks noGrp="1"/>
           </p:cNvSpPr>
@@ -4654,7 +4654,7 @@
       </p:sp>
       <p:sp>
         <p:nvSpPr>
-          <p:cNvPr id="751058720" name="Slide Number Placeholder 6"/>
+          <p:cNvPr id="364202411" name="Slide Number Placeholder 6"/>
           <p:cNvSpPr>
             <a:spLocks noGrp="1"/>
           </p:cNvSpPr>
@@ -4710,7 +4710,7 @@
       </p:grpSpPr>
       <p:sp>
         <p:nvSpPr>
-          <p:cNvPr id="2005749354" name="Title Placeholder 1"/>
+          <p:cNvPr id="348793866" name="Title Placeholder 1"/>
           <p:cNvSpPr>
             <a:spLocks noGrp="1"/>
           </p:cNvSpPr>
@@ -4746,7 +4746,7 @@
       </p:sp>
       <p:sp>
         <p:nvSpPr>
-          <p:cNvPr id="605538154" name="Text Placeholder 2"/>
+          <p:cNvPr id="1381646351" name="Text Placeholder 2"/>
           <p:cNvSpPr>
             <a:spLocks noGrp="1"/>
           </p:cNvSpPr>
@@ -4822,7 +4822,7 @@
       </p:sp>
       <p:sp>
         <p:nvSpPr>
-          <p:cNvPr id="1333836630" name="Date Placeholder 3"/>
+          <p:cNvPr id="1074653600" name="Date Placeholder 3"/>
           <p:cNvSpPr>
             <a:spLocks noGrp="1"/>
           </p:cNvSpPr>
@@ -4866,7 +4866,7 @@
       </p:sp>
       <p:sp>
         <p:nvSpPr>
-          <p:cNvPr id="2059871103" name="Footer Placeholder 4"/>
+          <p:cNvPr id="1176555793" name="Footer Placeholder 4"/>
           <p:cNvSpPr>
             <a:spLocks noGrp="1"/>
           </p:cNvSpPr>
@@ -4906,7 +4906,7 @@
       </p:sp>
       <p:sp>
         <p:nvSpPr>
-          <p:cNvPr id="1898560453" name="Slide Number Placeholder 5"/>
+          <p:cNvPr id="1817711392" name="Slide Number Placeholder 5"/>
           <p:cNvSpPr>
             <a:spLocks noGrp="1"/>
           </p:cNvSpPr>
@@ -5274,7 +5274,7 @@
       </p:grpSpPr>
       <p:sp>
         <p:nvSpPr>
-          <p:cNvPr id="304441088" name=""/>
+          <p:cNvPr id="1145202722" name=""/>
           <p:cNvSpPr/>
           <p:nvPr/>
         </p:nvSpPr>
@@ -5318,7 +5318,7 @@
       </p:sp>
       <p:sp>
         <p:nvSpPr>
-          <p:cNvPr id="1180045867" name=""/>
+          <p:cNvPr id="1507025329" name=""/>
           <p:cNvSpPr txBox="1"/>
           <p:nvPr/>
         </p:nvSpPr>
@@ -5427,7 +5427,7 @@
       </p:sp>
       <p:sp>
         <p:nvSpPr>
-          <p:cNvPr id="1196769820" name=""/>
+          <p:cNvPr id="96612097" name=""/>
           <p:cNvSpPr txBox="1"/>
           <p:nvPr/>
         </p:nvSpPr>
@@ -5578,7 +5578,7 @@
       </p:sp>
       <p:sp>
         <p:nvSpPr>
-          <p:cNvPr id="1982053003" name=""/>
+          <p:cNvPr id="276607310" name=""/>
           <p:cNvSpPr txBox="1"/>
           <p:nvPr/>
         </p:nvSpPr>
@@ -5679,7 +5679,7 @@
                                           </p:stCondLst>
                                         </p:cTn>
                                         <p:tgtEl>
-                                          <p:spTgt spid="1180045867"/>
+                                          <p:spTgt spid="1507025329"/>
                                         </p:tgtEl>
                                         <p:attrNameLst>
                                           <p:attrName>style.visibility</p:attrName>
@@ -5693,7 +5693,7 @@
                                       <p:cBhvr>
                                         <p:cTn id="19" dur="500"/>
                                         <p:tgtEl>
-                                          <p:spTgt spid="1180045867"/>
+                                          <p:spTgt spid="1507025329"/>
                                         </p:tgtEl>
                                       </p:cBhvr>
                                     </p:animEffect>
@@ -5732,7 +5732,7 @@
                                           </p:stCondLst>
                                         </p:cTn>
                                         <p:tgtEl>
-                                          <p:spTgt spid="1196769820"/>
+                                          <p:spTgt spid="96612097"/>
                                         </p:tgtEl>
                                         <p:attrNameLst>
                                           <p:attrName>style.visibility</p:attrName>
@@ -5746,7 +5746,7 @@
                                       <p:cBhvr>
                                         <p:cTn id="14" dur="500"/>
                                         <p:tgtEl>
-                                          <p:spTgt spid="1196769820"/>
+                                          <p:spTgt spid="96612097"/>
                                         </p:tgtEl>
                                       </p:cBhvr>
                                     </p:animEffect>
@@ -5781,7 +5781,7 @@
                                       <p:cBhvr>
                                         <p:cTn id="6" dur="500"/>
                                         <p:tgtEl>
-                                          <p:spTgt spid="1180045867"/>
+                                          <p:spTgt spid="1507025329"/>
                                         </p:tgtEl>
                                       </p:cBhvr>
                                     </p:animEffect>
@@ -5793,7 +5793,7 @@
                                           </p:stCondLst>
                                         </p:cTn>
                                         <p:tgtEl>
-                                          <p:spTgt spid="1180045867"/>
+                                          <p:spTgt spid="1507025329"/>
                                         </p:tgtEl>
                                         <p:attrNameLst>
                                           <p:attrName>style.visibility</p:attrName>
@@ -5816,7 +5816,7 @@
                                       <p:cBhvr>
                                         <p:cTn id="6" dur="500"/>
                                         <p:tgtEl>
-                                          <p:spTgt spid="1196769820"/>
+                                          <p:spTgt spid="96612097"/>
                                         </p:tgtEl>
                                       </p:cBhvr>
                                     </p:animEffect>
@@ -5828,7 +5828,7 @@
                                           </p:stCondLst>
                                         </p:cTn>
                                         <p:tgtEl>
-                                          <p:spTgt spid="1196769820"/>
+                                          <p:spTgt spid="96612097"/>
                                         </p:tgtEl>
                                         <p:attrNameLst>
                                           <p:attrName>style.visibility</p:attrName>
@@ -5899,7 +5899,7 @@
       </p:grpSpPr>
       <p:sp>
         <p:nvSpPr>
-          <p:cNvPr id="585719289" name="Rectangle 1407440435"/>
+          <p:cNvPr id="1440358065" name="Rectangle 1407440435"/>
           <p:cNvSpPr/>
           <p:nvPr/>
         </p:nvSpPr>
@@ -5955,7 +5955,7 @@
       </p:sp>
       <p:grpSp>
         <p:nvGrpSpPr>
-          <p:cNvPr id="1958228129" name=""/>
+          <p:cNvPr id="1401632671" name=""/>
           <p:cNvGrpSpPr/>
           <p:nvPr/>
         </p:nvGrpSpPr>
@@ -6074,7 +6074,7 @@
       </p:grpSp>
       <p:grpSp>
         <p:nvGrpSpPr>
-          <p:cNvPr id="173879407" name=""/>
+          <p:cNvPr id="908546490" name=""/>
           <p:cNvGrpSpPr/>
           <p:nvPr/>
         </p:nvGrpSpPr>
@@ -6196,7 +6196,7 @@
       </p:grpSp>
       <p:grpSp>
         <p:nvGrpSpPr>
-          <p:cNvPr id="875513679" name=""/>
+          <p:cNvPr id="1831736645" name=""/>
           <p:cNvGrpSpPr/>
           <p:nvPr/>
         </p:nvGrpSpPr>
@@ -6315,7 +6315,7 @@
       </p:grpSp>
       <p:grpSp>
         <p:nvGrpSpPr>
-          <p:cNvPr id="1927168403" name=""/>
+          <p:cNvPr id="1003652675" name=""/>
           <p:cNvGrpSpPr/>
           <p:nvPr/>
         </p:nvGrpSpPr>
@@ -6434,7 +6434,7 @@
       </p:grpSp>
       <p:grpSp>
         <p:nvGrpSpPr>
-          <p:cNvPr id="1264289532" name=""/>
+          <p:cNvPr id="936246392" name=""/>
           <p:cNvGrpSpPr/>
           <p:nvPr/>
         </p:nvGrpSpPr>
@@ -6553,7 +6553,7 @@
       </p:grpSp>
       <p:sp>
         <p:nvSpPr>
-          <p:cNvPr id="163824251" name=""/>
+          <p:cNvPr id="807942016" name=""/>
           <p:cNvSpPr txBox="1"/>
           <p:nvPr/>
         </p:nvSpPr>
@@ -6598,7 +6598,7 @@
       </p:sp>
       <p:sp>
         <p:nvSpPr>
-          <p:cNvPr id="889719988" name=""/>
+          <p:cNvPr id="1611174560" name=""/>
           <p:cNvSpPr txBox="1"/>
           <p:nvPr/>
         </p:nvSpPr>
@@ -6649,7 +6649,7 @@
       </p:sp>
       <p:sp>
         <p:nvSpPr>
-          <p:cNvPr id="922820740" name=""/>
+          <p:cNvPr id="1149429643" name=""/>
           <p:cNvSpPr txBox="1"/>
           <p:nvPr/>
         </p:nvSpPr>
@@ -6694,7 +6694,7 @@
       </p:sp>
       <p:sp>
         <p:nvSpPr>
-          <p:cNvPr id="1705899408" name=""/>
+          <p:cNvPr id="1196192018" name=""/>
           <p:cNvSpPr txBox="1"/>
           <p:nvPr/>
         </p:nvSpPr>
@@ -6739,7 +6739,7 @@
       </p:sp>
       <p:sp>
         <p:nvSpPr>
-          <p:cNvPr id="1279223454" name=""/>
+          <p:cNvPr id="834625246" name=""/>
           <p:cNvSpPr txBox="1"/>
           <p:nvPr/>
         </p:nvSpPr>
@@ -6784,7 +6784,7 @@
       </p:sp>
       <p:sp>
         <p:nvSpPr>
-          <p:cNvPr id="1630268434" name=""/>
+          <p:cNvPr id="1722088170" name=""/>
           <p:cNvSpPr txBox="1"/>
           <p:nvPr/>
         </p:nvSpPr>
@@ -6840,7 +6840,7 @@
       </p:sp>
       <p:sp>
         <p:nvSpPr>
-          <p:cNvPr id="1322108842" name=""/>
+          <p:cNvPr id="1235241141" name=""/>
           <p:cNvSpPr txBox="1"/>
           <p:nvPr/>
         </p:nvSpPr>
@@ -6885,7 +6885,7 @@
       </p:sp>
       <p:grpSp>
         <p:nvGrpSpPr>
-          <p:cNvPr id="682247796" name=""/>
+          <p:cNvPr id="588615241" name=""/>
           <p:cNvGrpSpPr/>
           <p:nvPr/>
         </p:nvGrpSpPr>
@@ -7042,7 +7042,7 @@
       </p:grpSp>
       <p:grpSp>
         <p:nvGrpSpPr>
-          <p:cNvPr id="1748684039" name=""/>
+          <p:cNvPr id="1854272998" name=""/>
           <p:cNvGrpSpPr/>
           <p:nvPr/>
         </p:nvGrpSpPr>
@@ -7317,7 +7317,7 @@
                                           </p:stCondLst>
                                         </p:cTn>
                                         <p:tgtEl>
-                                          <p:spTgt spid="1630268434"/>
+                                          <p:spTgt spid="1722088170"/>
                                         </p:tgtEl>
                                         <p:attrNameLst>
                                           <p:attrName>style.visibility</p:attrName>
@@ -7331,7 +7331,7 @@
                                       <p:cBhvr>
                                         <p:cTn id="29" dur="500"/>
                                         <p:tgtEl>
-                                          <p:spTgt spid="1630268434"/>
+                                          <p:spTgt spid="1722088170"/>
                                         </p:tgtEl>
                                       </p:cBhvr>
                                     </p:animEffect>
@@ -7352,7 +7352,7 @@
                                           </p:stCondLst>
                                         </p:cTn>
                                         <p:tgtEl>
-                                          <p:spTgt spid="1322108842"/>
+                                          <p:spTgt spid="1235241141"/>
                                         </p:tgtEl>
                                         <p:attrNameLst>
                                           <p:attrName>style.visibility</p:attrName>
@@ -7366,7 +7366,7 @@
                                       <p:cBhvr>
                                         <p:cTn id="26" dur="500"/>
                                         <p:tgtEl>
-                                          <p:spTgt spid="1322108842"/>
+                                          <p:spTgt spid="1235241141"/>
                                         </p:tgtEl>
                                       </p:cBhvr>
                                     </p:animEffect>
@@ -7387,7 +7387,7 @@
                                           </p:stCondLst>
                                         </p:cTn>
                                         <p:tgtEl>
-                                          <p:spTgt spid="682247796"/>
+                                          <p:spTgt spid="588615241"/>
                                         </p:tgtEl>
                                         <p:attrNameLst>
                                           <p:attrName>style.visibility</p:attrName>
@@ -7401,7 +7401,7 @@
                                       <p:cBhvr>
                                         <p:cTn id="23" dur="500"/>
                                         <p:tgtEl>
-                                          <p:spTgt spid="682247796"/>
+                                          <p:spTgt spid="588615241"/>
                                         </p:tgtEl>
                                       </p:cBhvr>
                                     </p:animEffect>
@@ -7422,7 +7422,7 @@
                                           </p:stCondLst>
                                         </p:cTn>
                                         <p:tgtEl>
-                                          <p:spTgt spid="1748684039"/>
+                                          <p:spTgt spid="1854272998"/>
                                         </p:tgtEl>
                                         <p:attrNameLst>
                                           <p:attrName>style.visibility</p:attrName>
@@ -7436,7 +7436,7 @@
                                       <p:cBhvr>
                                         <p:cTn id="20" dur="500"/>
                                         <p:tgtEl>
-                                          <p:spTgt spid="1748684039"/>
+                                          <p:spTgt spid="1854272998"/>
                                         </p:tgtEl>
                                       </p:cBhvr>
                                     </p:animEffect>
@@ -7471,7 +7471,7 @@
                                       <p:cBhvr>
                                         <p:cTn id="6" dur="500"/>
                                         <p:tgtEl>
-                                          <p:spTgt spid="1630268434"/>
+                                          <p:spTgt spid="1722088170"/>
                                         </p:tgtEl>
                                       </p:cBhvr>
                                     </p:animEffect>
@@ -7483,7 +7483,7 @@
                                           </p:stCondLst>
                                         </p:cTn>
                                         <p:tgtEl>
-                                          <p:spTgt spid="1630268434"/>
+                                          <p:spTgt spid="1722088170"/>
                                         </p:tgtEl>
                                         <p:attrNameLst>
                                           <p:attrName>style.visibility</p:attrName>
@@ -7506,7 +7506,7 @@
                                       <p:cBhvr>
                                         <p:cTn id="6" dur="500"/>
                                         <p:tgtEl>
-                                          <p:spTgt spid="1322108842"/>
+                                          <p:spTgt spid="1235241141"/>
                                         </p:tgtEl>
                                       </p:cBhvr>
                                     </p:animEffect>
@@ -7518,7 +7518,7 @@
                                           </p:stCondLst>
                                         </p:cTn>
                                         <p:tgtEl>
-                                          <p:spTgt spid="1322108842"/>
+                                          <p:spTgt spid="1235241141"/>
                                         </p:tgtEl>
                                         <p:attrNameLst>
                                           <p:attrName>style.visibility</p:attrName>
@@ -7541,7 +7541,7 @@
                                       <p:cBhvr>
                                         <p:cTn id="6" dur="500"/>
                                         <p:tgtEl>
-                                          <p:spTgt spid="682247796"/>
+                                          <p:spTgt spid="588615241"/>
                                         </p:tgtEl>
                                       </p:cBhvr>
                                     </p:animEffect>
@@ -7553,7 +7553,7 @@
                                           </p:stCondLst>
                                         </p:cTn>
                                         <p:tgtEl>
-                                          <p:spTgt spid="682247796"/>
+                                          <p:spTgt spid="588615241"/>
                                         </p:tgtEl>
                                         <p:attrNameLst>
                                           <p:attrName>style.visibility</p:attrName>
@@ -7576,7 +7576,7 @@
                                       <p:cBhvr>
                                         <p:cTn id="6" dur="500"/>
                                         <p:tgtEl>
-                                          <p:spTgt spid="1748684039"/>
+                                          <p:spTgt spid="1854272998"/>
                                         </p:tgtEl>
                                       </p:cBhvr>
                                     </p:animEffect>
@@ -7588,7 +7588,7 @@
                                           </p:stCondLst>
                                         </p:cTn>
                                         <p:tgtEl>
-                                          <p:spTgt spid="1748684039"/>
+                                          <p:spTgt spid="1854272998"/>
                                         </p:tgtEl>
                                         <p:attrNameLst>
                                           <p:attrName>style.visibility</p:attrName>
@@ -7659,13 +7659,13 @@
       </p:grpSpPr>
       <p:sp>
         <p:nvSpPr>
-          <p:cNvPr id="748478234" name="Rectangle 1407440435"/>
+          <p:cNvPr id="1525892193" name="Rectangle 1407440435"/>
           <p:cNvSpPr/>
           <p:nvPr/>
         </p:nvSpPr>
         <p:spPr bwMode="auto">
           <a:xfrm rot="0" flipH="0" flipV="0">
-            <a:off x="0" y="9142"/>
+            <a:off x="0" y="9141"/>
             <a:ext cx="12201201" cy="6846093"/>
           </a:xfrm>
           <a:prstGeom prst="rect">
@@ -7715,7 +7715,7 @@
       </p:sp>
       <p:grpSp>
         <p:nvGrpSpPr>
-          <p:cNvPr id="705432233" name=""/>
+          <p:cNvPr id="1890269772" name=""/>
           <p:cNvGrpSpPr/>
           <p:nvPr/>
         </p:nvGrpSpPr>
@@ -7834,7 +7834,7 @@
       </p:grpSp>
       <p:grpSp>
         <p:nvGrpSpPr>
-          <p:cNvPr id="1240602306" name=""/>
+          <p:cNvPr id="1186870290" name=""/>
           <p:cNvGrpSpPr/>
           <p:nvPr/>
         </p:nvGrpSpPr>
@@ -7956,7 +7956,7 @@
       </p:grpSp>
       <p:grpSp>
         <p:nvGrpSpPr>
-          <p:cNvPr id="298504558" name=""/>
+          <p:cNvPr id="430928441" name=""/>
           <p:cNvGrpSpPr/>
           <p:nvPr/>
         </p:nvGrpSpPr>
@@ -8075,7 +8075,7 @@
       </p:grpSp>
       <p:grpSp>
         <p:nvGrpSpPr>
-          <p:cNvPr id="141225895" name=""/>
+          <p:cNvPr id="1139351869" name=""/>
           <p:cNvGrpSpPr/>
           <p:nvPr/>
         </p:nvGrpSpPr>
@@ -8194,7 +8194,7 @@
       </p:grpSp>
       <p:grpSp>
         <p:nvGrpSpPr>
-          <p:cNvPr id="1314247282" name=""/>
+          <p:cNvPr id="552489685" name=""/>
           <p:cNvGrpSpPr/>
           <p:nvPr/>
         </p:nvGrpSpPr>
@@ -8313,7 +8313,7 @@
       </p:grpSp>
       <p:sp>
         <p:nvSpPr>
-          <p:cNvPr id="1377040514" name=""/>
+          <p:cNvPr id="1475068345" name=""/>
           <p:cNvSpPr txBox="1"/>
           <p:nvPr/>
         </p:nvSpPr>
@@ -8358,7 +8358,7 @@
       </p:sp>
       <p:grpSp>
         <p:nvGrpSpPr>
-          <p:cNvPr id="550665896" name=""/>
+          <p:cNvPr id="1024731774" name=""/>
           <p:cNvGrpSpPr/>
           <p:nvPr/>
         </p:nvGrpSpPr>
@@ -8537,7 +8537,7 @@
       </p:grpSp>
       <p:grpSp>
         <p:nvGrpSpPr>
-          <p:cNvPr id="59871912" name=""/>
+          <p:cNvPr id="1970075965" name=""/>
           <p:cNvGrpSpPr/>
           <p:nvPr/>
         </p:nvGrpSpPr>
@@ -8729,7 +8729,7 @@
       </p:grpSp>
       <p:grpSp>
         <p:nvGrpSpPr>
-          <p:cNvPr id="1292910327" name=""/>
+          <p:cNvPr id="1457190544" name=""/>
           <p:cNvGrpSpPr/>
           <p:nvPr/>
         </p:nvGrpSpPr>
@@ -8956,7 +8956,7 @@
                                           </p:stCondLst>
                                         </p:cTn>
                                         <p:tgtEl>
-                                          <p:spTgt spid="550665896"/>
+                                          <p:spTgt spid="1024731774"/>
                                         </p:tgtEl>
                                         <p:attrNameLst>
                                           <p:attrName>style.visibility</p:attrName>
@@ -8970,7 +8970,7 @@
                                       <p:cBhvr additive="base">
                                         <p:cTn id="29" dur="500" fill="hold"/>
                                         <p:tgtEl>
-                                          <p:spTgt spid="550665896"/>
+                                          <p:spTgt spid="1024731774"/>
                                         </p:tgtEl>
                                         <p:attrNameLst>
                                           <p:attrName>ppt_x</p:attrName>
@@ -8993,7 +8993,7 @@
                                       <p:cBhvr additive="base">
                                         <p:cTn id="28" dur="500" fill="hold"/>
                                         <p:tgtEl>
-                                          <p:spTgt spid="550665896"/>
+                                          <p:spTgt spid="1024731774"/>
                                         </p:tgtEl>
                                         <p:attrNameLst>
                                           <p:attrName>ppt_y</p:attrName>
@@ -9029,7 +9029,7 @@
                                           </p:stCondLst>
                                         </p:cTn>
                                         <p:tgtEl>
-                                          <p:spTgt spid="59871912"/>
+                                          <p:spTgt spid="1970075965"/>
                                         </p:tgtEl>
                                         <p:attrNameLst>
                                           <p:attrName>style.visibility</p:attrName>
@@ -9043,7 +9043,7 @@
                                       <p:cBhvr additive="base">
                                         <p:cTn id="25" dur="500" fill="hold"/>
                                         <p:tgtEl>
-                                          <p:spTgt spid="59871912"/>
+                                          <p:spTgt spid="1970075965"/>
                                         </p:tgtEl>
                                         <p:attrNameLst>
                                           <p:attrName>ppt_x</p:attrName>
@@ -9066,7 +9066,7 @@
                                       <p:cBhvr additive="base">
                                         <p:cTn id="24" dur="500" fill="hold"/>
                                         <p:tgtEl>
-                                          <p:spTgt spid="59871912"/>
+                                          <p:spTgt spid="1970075965"/>
                                         </p:tgtEl>
                                         <p:attrNameLst>
                                           <p:attrName>ppt_y</p:attrName>
@@ -9102,7 +9102,7 @@
                                           </p:stCondLst>
                                         </p:cTn>
                                         <p:tgtEl>
-                                          <p:spTgt spid="1292910327"/>
+                                          <p:spTgt spid="1457190544"/>
                                         </p:tgtEl>
                                         <p:attrNameLst>
                                           <p:attrName>style.visibility</p:attrName>
@@ -9116,7 +9116,7 @@
                                       <p:cBhvr additive="base">
                                         <p:cTn id="21" dur="500" fill="hold"/>
                                         <p:tgtEl>
-                                          <p:spTgt spid="1292910327"/>
+                                          <p:spTgt spid="1457190544"/>
                                         </p:tgtEl>
                                         <p:attrNameLst>
                                           <p:attrName>ppt_x</p:attrName>
@@ -9139,7 +9139,7 @@
                                       <p:cBhvr additive="base">
                                         <p:cTn id="20" dur="500" fill="hold"/>
                                         <p:tgtEl>
-                                          <p:spTgt spid="1292910327"/>
+                                          <p:spTgt spid="1457190544"/>
                                         </p:tgtEl>
                                         <p:attrNameLst>
                                           <p:attrName>ppt_y</p:attrName>
@@ -9189,7 +9189,7 @@
                                       <p:cBhvr additive="base">
                                         <p:cTn id="16" dur="500"/>
                                         <p:tgtEl>
-                                          <p:spTgt spid="550665896"/>
+                                          <p:spTgt spid="1024731774"/>
                                         </p:tgtEl>
                                         <p:attrNameLst>
                                           <p:attrName>ppt_x</p:attrName>
@@ -9212,7 +9212,7 @@
                                       <p:cBhvr additive="base">
                                         <p:cTn id="15" dur="500"/>
                                         <p:tgtEl>
-                                          <p:spTgt spid="550665896"/>
+                                          <p:spTgt spid="1024731774"/>
                                         </p:tgtEl>
                                         <p:attrNameLst>
                                           <p:attrName>ppt_y</p:attrName>
@@ -9239,7 +9239,7 @@
                                           </p:stCondLst>
                                         </p:cTn>
                                         <p:tgtEl>
-                                          <p:spTgt spid="550665896"/>
+                                          <p:spTgt spid="1024731774"/>
                                         </p:tgtEl>
                                         <p:attrNameLst>
                                           <p:attrName>style.visibility</p:attrName>
@@ -9262,7 +9262,7 @@
                                       <p:cBhvr additive="base">
                                         <p:cTn id="12" dur="500"/>
                                         <p:tgtEl>
-                                          <p:spTgt spid="59871912"/>
+                                          <p:spTgt spid="1970075965"/>
                                         </p:tgtEl>
                                         <p:attrNameLst>
                                           <p:attrName>ppt_x</p:attrName>
@@ -9285,7 +9285,7 @@
                                       <p:cBhvr additive="base">
                                         <p:cTn id="11" dur="500"/>
                                         <p:tgtEl>
-                                          <p:spTgt spid="59871912"/>
+                                          <p:spTgt spid="1970075965"/>
                                         </p:tgtEl>
                                         <p:attrNameLst>
                                           <p:attrName>ppt_y</p:attrName>
@@ -9312,7 +9312,7 @@
                                           </p:stCondLst>
                                         </p:cTn>
                                         <p:tgtEl>
-                                          <p:spTgt spid="59871912"/>
+                                          <p:spTgt spid="1970075965"/>
                                         </p:tgtEl>
                                         <p:attrNameLst>
                                           <p:attrName>style.visibility</p:attrName>
@@ -9335,7 +9335,7 @@
                                       <p:cBhvr additive="base">
                                         <p:cTn id="8" dur="500"/>
                                         <p:tgtEl>
-                                          <p:spTgt spid="1292910327"/>
+                                          <p:spTgt spid="1457190544"/>
                                         </p:tgtEl>
                                         <p:attrNameLst>
                                           <p:attrName>ppt_x</p:attrName>
@@ -9358,7 +9358,7 @@
                                       <p:cBhvr additive="base">
                                         <p:cTn id="7" dur="500"/>
                                         <p:tgtEl>
-                                          <p:spTgt spid="1292910327"/>
+                                          <p:spTgt spid="1457190544"/>
                                         </p:tgtEl>
                                         <p:attrNameLst>
                                           <p:attrName>ppt_y</p:attrName>
@@ -9385,7 +9385,7 @@
                                           </p:stCondLst>
                                         </p:cTn>
                                         <p:tgtEl>
-                                          <p:spTgt spid="1292910327"/>
+                                          <p:spTgt spid="1457190544"/>
                                         </p:tgtEl>
                                         <p:attrNameLst>
                                           <p:attrName>style.visibility</p:attrName>
@@ -9456,13 +9456,13 @@
       </p:grpSpPr>
       <p:sp>
         <p:nvSpPr>
-          <p:cNvPr id="1671717900" name="Rectangle 1407440435"/>
+          <p:cNvPr id="2012796418" name="Rectangle 1407440435"/>
           <p:cNvSpPr/>
           <p:nvPr/>
         </p:nvSpPr>
         <p:spPr bwMode="auto">
           <a:xfrm rot="0" flipH="0" flipV="0">
-            <a:off x="0" y="9142"/>
+            <a:off x="0" y="9141"/>
             <a:ext cx="12237836" cy="6846093"/>
           </a:xfrm>
           <a:prstGeom prst="rect">
@@ -9512,16 +9512,16 @@
       </p:sp>
       <p:grpSp>
         <p:nvGrpSpPr>
-          <p:cNvPr id="1930189812" name=""/>
+          <p:cNvPr id="214790062" name=""/>
           <p:cNvGrpSpPr/>
           <p:nvPr/>
         </p:nvGrpSpPr>
         <p:grpSpPr bwMode="auto">
           <a:xfrm>
             <a:off x="-1003545" y="6111"/>
-            <a:ext cx="13160467" cy="1374628"/>
+            <a:ext cx="13160467" cy="1374627"/>
             <a:chOff x="0" y="0"/>
-            <a:chExt cx="13160467" cy="1374628"/>
+            <a:chExt cx="13160467" cy="1374627"/>
           </a:xfrm>
         </p:grpSpPr>
         <p:sp>
@@ -9583,7 +9583,7 @@
           <p:spPr bwMode="auto">
             <a:xfrm rot="0" flipH="1" flipV="1">
               <a:off x="0" y="0"/>
-              <a:ext cx="979065" cy="1374628"/>
+              <a:ext cx="979065" cy="1374627"/>
             </a:xfrm>
             <a:prstGeom prst="chevron">
               <a:avLst>
@@ -9631,16 +9631,16 @@
       </p:grpSp>
       <p:grpSp>
         <p:nvGrpSpPr>
-          <p:cNvPr id="930404359" name=""/>
+          <p:cNvPr id="915423444" name=""/>
           <p:cNvGrpSpPr/>
           <p:nvPr/>
         </p:nvGrpSpPr>
         <p:grpSpPr bwMode="auto">
           <a:xfrm>
             <a:off x="9675144" y="1368567"/>
-            <a:ext cx="13160466" cy="1383771"/>
+            <a:ext cx="13160465" cy="1383771"/>
             <a:chOff x="0" y="0"/>
-            <a:chExt cx="13160466" cy="1383771"/>
+            <a:chExt cx="13160465" cy="1383771"/>
           </a:xfrm>
         </p:grpSpPr>
         <p:sp>
@@ -9702,7 +9702,7 @@
           <p:spPr bwMode="auto">
             <a:xfrm rot="0" flipH="0" flipV="1">
               <a:off x="12181401" y="0"/>
-              <a:ext cx="979065" cy="1374628"/>
+              <a:ext cx="979065" cy="1374627"/>
             </a:xfrm>
             <a:prstGeom prst="chevron">
               <a:avLst>
@@ -9753,16 +9753,16 @@
       </p:grpSp>
       <p:grpSp>
         <p:nvGrpSpPr>
-          <p:cNvPr id="684320409" name=""/>
+          <p:cNvPr id="1144279433" name=""/>
           <p:cNvGrpSpPr/>
           <p:nvPr/>
         </p:nvGrpSpPr>
         <p:grpSpPr bwMode="auto">
           <a:xfrm>
             <a:off x="-11032258" y="2743200"/>
-            <a:ext cx="13187930" cy="1374628"/>
+            <a:ext cx="13187930" cy="1374627"/>
             <a:chOff x="0" y="0"/>
-            <a:chExt cx="13187930" cy="1374628"/>
+            <a:chExt cx="13187930" cy="1374627"/>
           </a:xfrm>
         </p:grpSpPr>
         <p:sp>
@@ -9824,7 +9824,7 @@
           <p:spPr bwMode="auto">
             <a:xfrm rot="0" flipH="1" flipV="0">
               <a:off x="0" y="0"/>
-              <a:ext cx="979065" cy="1374628"/>
+              <a:ext cx="979065" cy="1374627"/>
             </a:xfrm>
             <a:prstGeom prst="chevron">
               <a:avLst>
@@ -9872,16 +9872,16 @@
       </p:grpSp>
       <p:grpSp>
         <p:nvGrpSpPr>
-          <p:cNvPr id="211360617" name=""/>
+          <p:cNvPr id="254802325" name=""/>
           <p:cNvGrpSpPr/>
           <p:nvPr/>
         </p:nvGrpSpPr>
         <p:grpSpPr bwMode="auto">
           <a:xfrm>
             <a:off x="9675144" y="4109005"/>
-            <a:ext cx="13160466" cy="1377390"/>
+            <a:ext cx="13160465" cy="1377390"/>
             <a:chOff x="0" y="0"/>
-            <a:chExt cx="13160466" cy="1377390"/>
+            <a:chExt cx="13160465" cy="1377390"/>
           </a:xfrm>
         </p:grpSpPr>
         <p:sp>
@@ -9943,7 +9943,7 @@
           <p:spPr bwMode="auto">
             <a:xfrm rot="0" flipH="0" flipV="1">
               <a:off x="12181401" y="0"/>
-              <a:ext cx="979065" cy="1374628"/>
+              <a:ext cx="979065" cy="1374627"/>
             </a:xfrm>
             <a:prstGeom prst="chevron">
               <a:avLst>
@@ -9991,16 +9991,16 @@
       </p:grpSp>
       <p:grpSp>
         <p:nvGrpSpPr>
-          <p:cNvPr id="1318346370" name=""/>
+          <p:cNvPr id="1865362773" name=""/>
           <p:cNvGrpSpPr/>
           <p:nvPr/>
         </p:nvGrpSpPr>
         <p:grpSpPr bwMode="auto">
           <a:xfrm>
             <a:off x="-11004795" y="5480605"/>
-            <a:ext cx="13160466" cy="1374628"/>
+            <a:ext cx="13160465" cy="1374627"/>
             <a:chOff x="0" y="0"/>
-            <a:chExt cx="13160466" cy="1374628"/>
+            <a:chExt cx="13160465" cy="1374627"/>
           </a:xfrm>
         </p:grpSpPr>
         <p:sp>
@@ -10062,7 +10062,7 @@
           <p:spPr bwMode="auto">
             <a:xfrm rot="0" flipH="1" flipV="0">
               <a:off x="0" y="0"/>
-              <a:ext cx="979065" cy="1374628"/>
+              <a:ext cx="979065" cy="1374627"/>
             </a:xfrm>
             <a:prstGeom prst="chevron">
               <a:avLst>
@@ -10110,7 +10110,7 @@
       </p:grpSp>
       <p:sp>
         <p:nvSpPr>
-          <p:cNvPr id="659074952" name=""/>
+          <p:cNvPr id="953050724" name=""/>
           <p:cNvSpPr txBox="1"/>
           <p:nvPr/>
         </p:nvSpPr>
@@ -10155,7 +10155,7 @@
       </p:sp>
       <p:sp>
         <p:nvSpPr>
-          <p:cNvPr id="499549557" name=""/>
+          <p:cNvPr id="1811940563" name=""/>
           <p:cNvSpPr txBox="1"/>
           <p:nvPr/>
         </p:nvSpPr>
@@ -10200,7 +10200,7 @@
       </p:sp>
       <p:sp>
         <p:nvSpPr>
-          <p:cNvPr id="788752709" name=""/>
+          <p:cNvPr id="625868333" name=""/>
           <p:cNvSpPr txBox="1"/>
           <p:nvPr/>
         </p:nvSpPr>
@@ -10245,7 +10245,7 @@
       </p:sp>
       <p:sp>
         <p:nvSpPr>
-          <p:cNvPr id="1206720393" name=""/>
+          <p:cNvPr id="1429908938" name=""/>
           <p:cNvSpPr txBox="1"/>
           <p:nvPr/>
         </p:nvSpPr>
@@ -10310,7 +10310,7 @@
       </p:sp>
       <p:pic>
         <p:nvPicPr>
-          <p:cNvPr id="982694700" name=""/>
+          <p:cNvPr id="1598370313" name=""/>
           <p:cNvPicPr>
             <a:picLocks noChangeAspect="1"/>
           </p:cNvPicPr>
@@ -10380,7 +10380,7 @@
                                           </p:stCondLst>
                                         </p:cTn>
                                         <p:tgtEl>
-                                          <p:spTgt spid="499549557"/>
+                                          <p:spTgt spid="1811940563"/>
                                         </p:tgtEl>
                                         <p:attrNameLst>
                                           <p:attrName>style.visibility</p:attrName>
@@ -10394,7 +10394,7 @@
                                       <p:cBhvr>
                                         <p:cTn id="29" dur="500"/>
                                         <p:tgtEl>
-                                          <p:spTgt spid="499549557"/>
+                                          <p:spTgt spid="1811940563"/>
                                         </p:tgtEl>
                                       </p:cBhvr>
                                     </p:animEffect>
@@ -10415,7 +10415,7 @@
                                           </p:stCondLst>
                                         </p:cTn>
                                         <p:tgtEl>
-                                          <p:spTgt spid="788752709"/>
+                                          <p:spTgt spid="625868333"/>
                                         </p:tgtEl>
                                         <p:attrNameLst>
                                           <p:attrName>style.visibility</p:attrName>
@@ -10429,7 +10429,7 @@
                                       <p:cBhvr>
                                         <p:cTn id="26" dur="500"/>
                                         <p:tgtEl>
-                                          <p:spTgt spid="788752709"/>
+                                          <p:spTgt spid="625868333"/>
                                         </p:tgtEl>
                                       </p:cBhvr>
                                     </p:animEffect>
@@ -10450,7 +10450,7 @@
                                           </p:stCondLst>
                                         </p:cTn>
                                         <p:tgtEl>
-                                          <p:spTgt spid="1206720393"/>
+                                          <p:spTgt spid="1429908938"/>
                                         </p:tgtEl>
                                         <p:attrNameLst>
                                           <p:attrName>style.visibility</p:attrName>
@@ -10464,7 +10464,7 @@
                                       <p:cBhvr>
                                         <p:cTn id="23" dur="500"/>
                                         <p:tgtEl>
-                                          <p:spTgt spid="1206720393"/>
+                                          <p:spTgt spid="1429908938"/>
                                         </p:tgtEl>
                                       </p:cBhvr>
                                     </p:animEffect>
@@ -10485,7 +10485,7 @@
                                           </p:stCondLst>
                                         </p:cTn>
                                         <p:tgtEl>
-                                          <p:spTgt spid="982694700"/>
+                                          <p:spTgt spid="1598370313"/>
                                         </p:tgtEl>
                                         <p:attrNameLst>
                                           <p:attrName>style.visibility</p:attrName>
@@ -10499,7 +10499,7 @@
                                       <p:cBhvr>
                                         <p:cTn id="20" dur="500"/>
                                         <p:tgtEl>
-                                          <p:spTgt spid="982694700"/>
+                                          <p:spTgt spid="1598370313"/>
                                         </p:tgtEl>
                                       </p:cBhvr>
                                     </p:animEffect>
@@ -10534,7 +10534,7 @@
                                       <p:cBhvr>
                                         <p:cTn id="6" dur="500"/>
                                         <p:tgtEl>
-                                          <p:spTgt spid="499549557"/>
+                                          <p:spTgt spid="1811940563"/>
                                         </p:tgtEl>
                                       </p:cBhvr>
                                     </p:animEffect>
@@ -10546,7 +10546,7 @@
                                           </p:stCondLst>
                                         </p:cTn>
                                         <p:tgtEl>
-                                          <p:spTgt spid="499549557"/>
+                                          <p:spTgt spid="1811940563"/>
                                         </p:tgtEl>
                                         <p:attrNameLst>
                                           <p:attrName>style.visibility</p:attrName>
@@ -10569,7 +10569,7 @@
                                       <p:cBhvr>
                                         <p:cTn id="6" dur="500"/>
                                         <p:tgtEl>
-                                          <p:spTgt spid="788752709"/>
+                                          <p:spTgt spid="625868333"/>
                                         </p:tgtEl>
                                       </p:cBhvr>
                                     </p:animEffect>
@@ -10581,7 +10581,7 @@
                                           </p:stCondLst>
                                         </p:cTn>
                                         <p:tgtEl>
-                                          <p:spTgt spid="788752709"/>
+                                          <p:spTgt spid="625868333"/>
                                         </p:tgtEl>
                                         <p:attrNameLst>
                                           <p:attrName>style.visibility</p:attrName>
@@ -10604,7 +10604,7 @@
                                       <p:cBhvr>
                                         <p:cTn id="6" dur="500"/>
                                         <p:tgtEl>
-                                          <p:spTgt spid="1206720393"/>
+                                          <p:spTgt spid="1429908938"/>
                                         </p:tgtEl>
                                       </p:cBhvr>
                                     </p:animEffect>
@@ -10616,7 +10616,7 @@
                                           </p:stCondLst>
                                         </p:cTn>
                                         <p:tgtEl>
-                                          <p:spTgt spid="1206720393"/>
+                                          <p:spTgt spid="1429908938"/>
                                         </p:tgtEl>
                                         <p:attrNameLst>
                                           <p:attrName>style.visibility</p:attrName>
@@ -10639,7 +10639,7 @@
                                       <p:cBhvr>
                                         <p:cTn id="6" dur="500"/>
                                         <p:tgtEl>
-                                          <p:spTgt spid="982694700"/>
+                                          <p:spTgt spid="1598370313"/>
                                         </p:tgtEl>
                                       </p:cBhvr>
                                     </p:animEffect>
@@ -10651,7 +10651,7 @@
                                           </p:stCondLst>
                                         </p:cTn>
                                         <p:tgtEl>
-                                          <p:spTgt spid="982694700"/>
+                                          <p:spTgt spid="1598370313"/>
                                         </p:tgtEl>
                                         <p:attrNameLst>
                                           <p:attrName>style.visibility</p:attrName>
@@ -10722,13 +10722,13 @@
       </p:grpSpPr>
       <p:sp>
         <p:nvSpPr>
-          <p:cNvPr id="1004530220" name="Rectangle 1407440435"/>
+          <p:cNvPr id="390554871" name="Rectangle 1407440435"/>
           <p:cNvSpPr/>
           <p:nvPr/>
         </p:nvSpPr>
         <p:spPr bwMode="auto">
           <a:xfrm rot="0" flipH="0" flipV="0">
-            <a:off x="0" y="9142"/>
+            <a:off x="-14537" y="90784"/>
             <a:ext cx="12221075" cy="6846093"/>
           </a:xfrm>
           <a:prstGeom prst="rect">
@@ -10778,16 +10778,16 @@
       </p:sp>
       <p:grpSp>
         <p:nvGrpSpPr>
-          <p:cNvPr id="475270656" name=""/>
+          <p:cNvPr id="1408440190" name=""/>
           <p:cNvGrpSpPr/>
           <p:nvPr/>
         </p:nvGrpSpPr>
         <p:grpSpPr bwMode="auto">
           <a:xfrm>
             <a:off x="-1003545" y="6111"/>
-            <a:ext cx="13160467" cy="1374628"/>
+            <a:ext cx="13160467" cy="1374627"/>
             <a:chOff x="0" y="0"/>
-            <a:chExt cx="13160467" cy="1374628"/>
+            <a:chExt cx="13160467" cy="1374627"/>
           </a:xfrm>
         </p:grpSpPr>
         <p:sp>
@@ -10849,7 +10849,7 @@
           <p:spPr bwMode="auto">
             <a:xfrm rot="0" flipH="1" flipV="1">
               <a:off x="0" y="0"/>
-              <a:ext cx="979065" cy="1374628"/>
+              <a:ext cx="979065" cy="1374627"/>
             </a:xfrm>
             <a:prstGeom prst="chevron">
               <a:avLst>
@@ -10897,16 +10897,16 @@
       </p:grpSp>
       <p:grpSp>
         <p:nvGrpSpPr>
-          <p:cNvPr id="224045268" name=""/>
+          <p:cNvPr id="1624657527" name=""/>
           <p:cNvGrpSpPr/>
           <p:nvPr/>
         </p:nvGrpSpPr>
         <p:grpSpPr bwMode="auto">
           <a:xfrm>
             <a:off x="9675144" y="1368567"/>
-            <a:ext cx="13160466" cy="1383771"/>
+            <a:ext cx="13160465" cy="1383771"/>
             <a:chOff x="0" y="0"/>
-            <a:chExt cx="13160466" cy="1383771"/>
+            <a:chExt cx="13160465" cy="1383771"/>
           </a:xfrm>
         </p:grpSpPr>
         <p:sp>
@@ -10968,7 +10968,7 @@
           <p:spPr bwMode="auto">
             <a:xfrm rot="0" flipH="0" flipV="1">
               <a:off x="12181401" y="0"/>
-              <a:ext cx="979065" cy="1374628"/>
+              <a:ext cx="979065" cy="1374627"/>
             </a:xfrm>
             <a:prstGeom prst="chevron">
               <a:avLst>
@@ -11019,16 +11019,16 @@
       </p:grpSp>
       <p:grpSp>
         <p:nvGrpSpPr>
-          <p:cNvPr id="1103280927" name=""/>
+          <p:cNvPr id="359530366" name=""/>
           <p:cNvGrpSpPr/>
           <p:nvPr/>
         </p:nvGrpSpPr>
         <p:grpSpPr bwMode="auto">
           <a:xfrm>
             <a:off x="-11032258" y="2743200"/>
-            <a:ext cx="13187930" cy="1374628"/>
+            <a:ext cx="13187930" cy="1374627"/>
             <a:chOff x="0" y="0"/>
-            <a:chExt cx="13187930" cy="1374628"/>
+            <a:chExt cx="13187930" cy="1374627"/>
           </a:xfrm>
         </p:grpSpPr>
         <p:sp>
@@ -11090,7 +11090,7 @@
           <p:spPr bwMode="auto">
             <a:xfrm rot="0" flipH="1" flipV="0">
               <a:off x="0" y="0"/>
-              <a:ext cx="979065" cy="1374628"/>
+              <a:ext cx="979065" cy="1374627"/>
             </a:xfrm>
             <a:prstGeom prst="chevron">
               <a:avLst>
@@ -11138,16 +11138,16 @@
       </p:grpSp>
       <p:grpSp>
         <p:nvGrpSpPr>
-          <p:cNvPr id="722401799" name=""/>
+          <p:cNvPr id="1368708420" name=""/>
           <p:cNvGrpSpPr/>
           <p:nvPr/>
         </p:nvGrpSpPr>
         <p:grpSpPr bwMode="auto">
           <a:xfrm>
             <a:off x="9675144" y="4109005"/>
-            <a:ext cx="13160466" cy="1377390"/>
+            <a:ext cx="13160465" cy="1377390"/>
             <a:chOff x="0" y="0"/>
-            <a:chExt cx="13160466" cy="1377390"/>
+            <a:chExt cx="13160465" cy="1377390"/>
           </a:xfrm>
         </p:grpSpPr>
         <p:sp>
@@ -11209,7 +11209,7 @@
           <p:spPr bwMode="auto">
             <a:xfrm rot="0" flipH="0" flipV="1">
               <a:off x="12181401" y="0"/>
-              <a:ext cx="979065" cy="1374628"/>
+              <a:ext cx="979065" cy="1374627"/>
             </a:xfrm>
             <a:prstGeom prst="chevron">
               <a:avLst>
@@ -11257,16 +11257,16 @@
       </p:grpSp>
       <p:grpSp>
         <p:nvGrpSpPr>
-          <p:cNvPr id="1943175602" name=""/>
+          <p:cNvPr id="41085469" name=""/>
           <p:cNvGrpSpPr/>
           <p:nvPr/>
         </p:nvGrpSpPr>
         <p:grpSpPr bwMode="auto">
           <a:xfrm>
             <a:off x="-11004795" y="5480605"/>
-            <a:ext cx="13160466" cy="1374628"/>
+            <a:ext cx="13160465" cy="1374627"/>
             <a:chOff x="0" y="0"/>
-            <a:chExt cx="13160466" cy="1374628"/>
+            <a:chExt cx="13160465" cy="1374627"/>
           </a:xfrm>
         </p:grpSpPr>
         <p:sp>
@@ -11328,7 +11328,7 @@
           <p:spPr bwMode="auto">
             <a:xfrm rot="0" flipH="1" flipV="0">
               <a:off x="0" y="0"/>
-              <a:ext cx="979065" cy="1374628"/>
+              <a:ext cx="979065" cy="1374627"/>
             </a:xfrm>
             <a:prstGeom prst="chevron">
               <a:avLst>
@@ -11376,7 +11376,7 @@
       </p:grpSp>
       <p:sp>
         <p:nvSpPr>
-          <p:cNvPr id="1595950365" name=""/>
+          <p:cNvPr id="1669018598" name=""/>
           <p:cNvSpPr txBox="1"/>
           <p:nvPr/>
         </p:nvSpPr>
@@ -11421,7 +11421,7 @@
       </p:sp>
       <p:sp>
         <p:nvSpPr>
-          <p:cNvPr id="1886483530" name=""/>
+          <p:cNvPr id="1420359191" name=""/>
           <p:cNvSpPr txBox="1"/>
           <p:nvPr/>
         </p:nvSpPr>
@@ -11476,7 +11476,7 @@
       </p:sp>
       <p:grpSp>
         <p:nvGrpSpPr>
-          <p:cNvPr id="997648481" name=""/>
+          <p:cNvPr id="799993189" name=""/>
           <p:cNvGrpSpPr/>
           <p:nvPr/>
         </p:nvGrpSpPr>
@@ -11582,7 +11582,7 @@
       </p:grpSp>
       <p:grpSp>
         <p:nvGrpSpPr>
-          <p:cNvPr id="1138883120" name=""/>
+          <p:cNvPr id="839061655" name=""/>
           <p:cNvGrpSpPr/>
           <p:nvPr/>
         </p:nvGrpSpPr>
@@ -11688,13 +11688,13 @@
       </p:grpSp>
       <p:grpSp>
         <p:nvGrpSpPr>
-          <p:cNvPr id="2145033684" name=""/>
+          <p:cNvPr id="331630096" name=""/>
           <p:cNvGrpSpPr/>
           <p:nvPr/>
         </p:nvGrpSpPr>
         <p:grpSpPr bwMode="auto">
           <a:xfrm>
-            <a:off x="707516" y="5171770"/>
+            <a:off x="707516" y="5171769"/>
             <a:ext cx="10638590" cy="1281872"/>
             <a:chOff x="0" y="0"/>
             <a:chExt cx="10638590" cy="1281872"/>
@@ -11839,7 +11839,7 @@
                                           </p:stCondLst>
                                         </p:cTn>
                                         <p:tgtEl>
-                                          <p:spTgt spid="1886483530"/>
+                                          <p:spTgt spid="1420359191"/>
                                         </p:tgtEl>
                                         <p:attrNameLst>
                                           <p:attrName>style.visibility</p:attrName>
@@ -11853,7 +11853,7 @@
                                       <p:cBhvr>
                                         <p:cTn id="29" dur="500"/>
                                         <p:tgtEl>
-                                          <p:spTgt spid="1886483530"/>
+                                          <p:spTgt spid="1420359191"/>
                                         </p:tgtEl>
                                       </p:cBhvr>
                                     </p:animEffect>
@@ -11874,7 +11874,7 @@
                                           </p:stCondLst>
                                         </p:cTn>
                                         <p:tgtEl>
-                                          <p:spTgt spid="997648481"/>
+                                          <p:spTgt spid="799993189"/>
                                         </p:tgtEl>
                                         <p:attrNameLst>
                                           <p:attrName>style.visibility</p:attrName>
@@ -11888,7 +11888,7 @@
                                       <p:cBhvr>
                                         <p:cTn id="26" dur="500"/>
                                         <p:tgtEl>
-                                          <p:spTgt spid="997648481"/>
+                                          <p:spTgt spid="799993189"/>
                                         </p:tgtEl>
                                       </p:cBhvr>
                                     </p:animEffect>
@@ -11909,7 +11909,7 @@
                                           </p:stCondLst>
                                         </p:cTn>
                                         <p:tgtEl>
-                                          <p:spTgt spid="1138883120"/>
+                                          <p:spTgt spid="839061655"/>
                                         </p:tgtEl>
                                         <p:attrNameLst>
                                           <p:attrName>style.visibility</p:attrName>
@@ -11923,7 +11923,7 @@
                                       <p:cBhvr>
                                         <p:cTn id="23" dur="500"/>
                                         <p:tgtEl>
-                                          <p:spTgt spid="1138883120"/>
+                                          <p:spTgt spid="839061655"/>
                                         </p:tgtEl>
                                       </p:cBhvr>
                                     </p:animEffect>
@@ -11944,7 +11944,7 @@
                                           </p:stCondLst>
                                         </p:cTn>
                                         <p:tgtEl>
-                                          <p:spTgt spid="2145033684"/>
+                                          <p:spTgt spid="331630096"/>
                                         </p:tgtEl>
                                         <p:attrNameLst>
                                           <p:attrName>style.visibility</p:attrName>
@@ -11958,7 +11958,7 @@
                                       <p:cBhvr>
                                         <p:cTn id="20" dur="500"/>
                                         <p:tgtEl>
-                                          <p:spTgt spid="2145033684"/>
+                                          <p:spTgt spid="331630096"/>
                                         </p:tgtEl>
                                       </p:cBhvr>
                                     </p:animEffect>
@@ -11993,7 +11993,7 @@
                                       <p:cBhvr>
                                         <p:cTn id="6" dur="500"/>
                                         <p:tgtEl>
-                                          <p:spTgt spid="1886483530"/>
+                                          <p:spTgt spid="1420359191"/>
                                         </p:tgtEl>
                                       </p:cBhvr>
                                     </p:animEffect>
@@ -12005,7 +12005,7 @@
                                           </p:stCondLst>
                                         </p:cTn>
                                         <p:tgtEl>
-                                          <p:spTgt spid="1886483530"/>
+                                          <p:spTgt spid="1420359191"/>
                                         </p:tgtEl>
                                         <p:attrNameLst>
                                           <p:attrName>style.visibility</p:attrName>
@@ -12028,7 +12028,7 @@
                                       <p:cBhvr>
                                         <p:cTn id="6" dur="500"/>
                                         <p:tgtEl>
-                                          <p:spTgt spid="997648481"/>
+                                          <p:spTgt spid="799993189"/>
                                         </p:tgtEl>
                                       </p:cBhvr>
                                     </p:animEffect>
@@ -12040,7 +12040,7 @@
                                           </p:stCondLst>
                                         </p:cTn>
                                         <p:tgtEl>
-                                          <p:spTgt spid="997648481"/>
+                                          <p:spTgt spid="799993189"/>
                                         </p:tgtEl>
                                         <p:attrNameLst>
                                           <p:attrName>style.visibility</p:attrName>
@@ -12063,7 +12063,7 @@
                                       <p:cBhvr>
                                         <p:cTn id="6" dur="500"/>
                                         <p:tgtEl>
-                                          <p:spTgt spid="1138883120"/>
+                                          <p:spTgt spid="839061655"/>
                                         </p:tgtEl>
                                       </p:cBhvr>
                                     </p:animEffect>
@@ -12075,7 +12075,7 @@
                                           </p:stCondLst>
                                         </p:cTn>
                                         <p:tgtEl>
-                                          <p:spTgt spid="1138883120"/>
+                                          <p:spTgt spid="839061655"/>
                                         </p:tgtEl>
                                         <p:attrNameLst>
                                           <p:attrName>style.visibility</p:attrName>
@@ -12098,7 +12098,7 @@
                                       <p:cBhvr>
                                         <p:cTn id="6" dur="500"/>
                                         <p:tgtEl>
-                                          <p:spTgt spid="2145033684"/>
+                                          <p:spTgt spid="331630096"/>
                                         </p:tgtEl>
                                       </p:cBhvr>
                                     </p:animEffect>
@@ -12110,7 +12110,7 @@
                                           </p:stCondLst>
                                         </p:cTn>
                                         <p:tgtEl>
-                                          <p:spTgt spid="2145033684"/>
+                                          <p:spTgt spid="331630096"/>
                                         </p:tgtEl>
                                         <p:attrNameLst>
                                           <p:attrName>style.visibility</p:attrName>
@@ -12181,7 +12181,7 @@
       </p:grpSpPr>
       <p:sp>
         <p:nvSpPr>
-          <p:cNvPr id="2008203112" name="Rectangle 1407440435"/>
+          <p:cNvPr id="1578414414" name="Rectangle 1407440435"/>
           <p:cNvSpPr/>
           <p:nvPr/>
         </p:nvSpPr>
@@ -12237,7 +12237,7 @@
       </p:sp>
       <p:grpSp>
         <p:nvGrpSpPr>
-          <p:cNvPr id="1607899005" name=""/>
+          <p:cNvPr id="472000086" name=""/>
           <p:cNvGrpSpPr/>
           <p:nvPr/>
         </p:nvGrpSpPr>
@@ -12356,7 +12356,7 @@
       </p:grpSp>
       <p:grpSp>
         <p:nvGrpSpPr>
-          <p:cNvPr id="1726682594" name=""/>
+          <p:cNvPr id="683867778" name=""/>
           <p:cNvGrpSpPr/>
           <p:nvPr/>
         </p:nvGrpSpPr>
@@ -12478,7 +12478,7 @@
       </p:grpSp>
       <p:grpSp>
         <p:nvGrpSpPr>
-          <p:cNvPr id="524183848" name=""/>
+          <p:cNvPr id="457337561" name=""/>
           <p:cNvGrpSpPr/>
           <p:nvPr/>
         </p:nvGrpSpPr>
@@ -12597,7 +12597,7 @@
       </p:grpSp>
       <p:grpSp>
         <p:nvGrpSpPr>
-          <p:cNvPr id="178296913" name=""/>
+          <p:cNvPr id="554798591" name=""/>
           <p:cNvGrpSpPr/>
           <p:nvPr/>
         </p:nvGrpSpPr>
@@ -12716,7 +12716,7 @@
       </p:grpSp>
       <p:grpSp>
         <p:nvGrpSpPr>
-          <p:cNvPr id="1018839019" name=""/>
+          <p:cNvPr id="1056062885" name=""/>
           <p:cNvGrpSpPr/>
           <p:nvPr/>
         </p:nvGrpSpPr>
@@ -12835,7 +12835,7 @@
       </p:grpSp>
       <p:sp>
         <p:nvSpPr>
-          <p:cNvPr id="402627347" name=""/>
+          <p:cNvPr id="1618048354" name=""/>
           <p:cNvSpPr txBox="1"/>
           <p:nvPr/>
         </p:nvSpPr>
@@ -12880,7 +12880,7 @@
       </p:sp>
       <p:sp>
         <p:nvSpPr>
-          <p:cNvPr id="216034570" name=""/>
+          <p:cNvPr id="1680198247" name=""/>
           <p:cNvSpPr txBox="1"/>
           <p:nvPr/>
         </p:nvSpPr>
@@ -12931,7 +12931,7 @@
       </p:sp>
       <p:pic>
         <p:nvPicPr>
-          <p:cNvPr id="1648908911" name=""/>
+          <p:cNvPr id="954798525" name=""/>
           <p:cNvPicPr>
             <a:picLocks noChangeAspect="1"/>
           </p:cNvPicPr>
@@ -12995,13 +12995,13 @@
       </p:grpSpPr>
       <p:sp>
         <p:nvSpPr>
-          <p:cNvPr id="95950025" name="Rectangle 1407440435"/>
+          <p:cNvPr id="911503679" name="Rectangle 1407440435"/>
           <p:cNvSpPr/>
           <p:nvPr/>
         </p:nvSpPr>
         <p:spPr bwMode="auto">
           <a:xfrm rot="0" flipH="0" flipV="0">
-            <a:off x="0" y="9142"/>
+            <a:off x="0" y="9141"/>
             <a:ext cx="12129489" cy="6846093"/>
           </a:xfrm>
           <a:prstGeom prst="rect">
@@ -13051,16 +13051,16 @@
       </p:sp>
       <p:grpSp>
         <p:nvGrpSpPr>
-          <p:cNvPr id="703171839" name=""/>
+          <p:cNvPr id="875080208" name=""/>
           <p:cNvGrpSpPr/>
           <p:nvPr/>
         </p:nvGrpSpPr>
         <p:grpSpPr bwMode="auto">
           <a:xfrm>
             <a:off x="-1003545" y="6111"/>
-            <a:ext cx="13160467" cy="1374628"/>
+            <a:ext cx="13160467" cy="1374627"/>
             <a:chOff x="0" y="0"/>
-            <a:chExt cx="13160467" cy="1374628"/>
+            <a:chExt cx="13160467" cy="1374627"/>
           </a:xfrm>
         </p:grpSpPr>
         <p:sp>
@@ -13122,7 +13122,7 @@
           <p:spPr bwMode="auto">
             <a:xfrm rot="0" flipH="1" flipV="1">
               <a:off x="0" y="0"/>
-              <a:ext cx="979065" cy="1374628"/>
+              <a:ext cx="979065" cy="1374627"/>
             </a:xfrm>
             <a:prstGeom prst="chevron">
               <a:avLst>
@@ -13170,16 +13170,16 @@
       </p:grpSp>
       <p:grpSp>
         <p:nvGrpSpPr>
-          <p:cNvPr id="518367851" name=""/>
+          <p:cNvPr id="1260184522" name=""/>
           <p:cNvGrpSpPr/>
           <p:nvPr/>
         </p:nvGrpSpPr>
         <p:grpSpPr bwMode="auto">
           <a:xfrm>
             <a:off x="9675144" y="1368567"/>
-            <a:ext cx="13160466" cy="1383771"/>
+            <a:ext cx="13160465" cy="1383771"/>
             <a:chOff x="0" y="0"/>
-            <a:chExt cx="13160466" cy="1383771"/>
+            <a:chExt cx="13160465" cy="1383771"/>
           </a:xfrm>
         </p:grpSpPr>
         <p:sp>
@@ -13241,7 +13241,7 @@
           <p:spPr bwMode="auto">
             <a:xfrm rot="0" flipH="0" flipV="1">
               <a:off x="12181401" y="0"/>
-              <a:ext cx="979065" cy="1374628"/>
+              <a:ext cx="979065" cy="1374627"/>
             </a:xfrm>
             <a:prstGeom prst="chevron">
               <a:avLst>
@@ -13292,16 +13292,16 @@
       </p:grpSp>
       <p:grpSp>
         <p:nvGrpSpPr>
-          <p:cNvPr id="999492215" name=""/>
+          <p:cNvPr id="1894164977" name=""/>
           <p:cNvGrpSpPr/>
           <p:nvPr/>
         </p:nvGrpSpPr>
         <p:grpSpPr bwMode="auto">
           <a:xfrm>
             <a:off x="-11032258" y="2743200"/>
-            <a:ext cx="13187930" cy="1374628"/>
+            <a:ext cx="13187930" cy="1374627"/>
             <a:chOff x="0" y="0"/>
-            <a:chExt cx="13187930" cy="1374628"/>
+            <a:chExt cx="13187930" cy="1374627"/>
           </a:xfrm>
         </p:grpSpPr>
         <p:sp>
@@ -13363,7 +13363,7 @@
           <p:spPr bwMode="auto">
             <a:xfrm rot="0" flipH="1" flipV="0">
               <a:off x="0" y="0"/>
-              <a:ext cx="979065" cy="1374628"/>
+              <a:ext cx="979065" cy="1374627"/>
             </a:xfrm>
             <a:prstGeom prst="chevron">
               <a:avLst>
@@ -13411,16 +13411,16 @@
       </p:grpSp>
       <p:grpSp>
         <p:nvGrpSpPr>
-          <p:cNvPr id="914193141" name=""/>
+          <p:cNvPr id="1798870997" name=""/>
           <p:cNvGrpSpPr/>
           <p:nvPr/>
         </p:nvGrpSpPr>
         <p:grpSpPr bwMode="auto">
           <a:xfrm>
             <a:off x="9675144" y="4109005"/>
-            <a:ext cx="13160466" cy="1377390"/>
+            <a:ext cx="13160465" cy="1377390"/>
             <a:chOff x="0" y="0"/>
-            <a:chExt cx="13160466" cy="1377390"/>
+            <a:chExt cx="13160465" cy="1377390"/>
           </a:xfrm>
         </p:grpSpPr>
         <p:sp>
@@ -13482,7 +13482,7 @@
           <p:spPr bwMode="auto">
             <a:xfrm rot="0" flipH="0" flipV="1">
               <a:off x="12181401" y="0"/>
-              <a:ext cx="979065" cy="1374628"/>
+              <a:ext cx="979065" cy="1374627"/>
             </a:xfrm>
             <a:prstGeom prst="chevron">
               <a:avLst>
@@ -13530,16 +13530,16 @@
       </p:grpSp>
       <p:grpSp>
         <p:nvGrpSpPr>
-          <p:cNvPr id="1745112671" name=""/>
+          <p:cNvPr id="1164573377" name=""/>
           <p:cNvGrpSpPr/>
           <p:nvPr/>
         </p:nvGrpSpPr>
         <p:grpSpPr bwMode="auto">
           <a:xfrm>
             <a:off x="-11004795" y="5480605"/>
-            <a:ext cx="13160466" cy="1374628"/>
+            <a:ext cx="13160465" cy="1374627"/>
             <a:chOff x="0" y="0"/>
-            <a:chExt cx="13160466" cy="1374628"/>
+            <a:chExt cx="13160465" cy="1374627"/>
           </a:xfrm>
         </p:grpSpPr>
         <p:sp>
@@ -13601,7 +13601,7 @@
           <p:spPr bwMode="auto">
             <a:xfrm rot="0" flipH="1" flipV="0">
               <a:off x="0" y="0"/>
-              <a:ext cx="979065" cy="1374628"/>
+              <a:ext cx="979065" cy="1374627"/>
             </a:xfrm>
             <a:prstGeom prst="chevron">
               <a:avLst>
@@ -13649,7 +13649,7 @@
       </p:grpSp>
       <p:sp>
         <p:nvSpPr>
-          <p:cNvPr id="1251689195" name=""/>
+          <p:cNvPr id="1504589032" name=""/>
           <p:cNvSpPr txBox="1"/>
           <p:nvPr/>
         </p:nvSpPr>
@@ -13694,7 +13694,7 @@
       </p:sp>
       <p:sp>
         <p:nvSpPr>
-          <p:cNvPr id="1178579085" name=""/>
+          <p:cNvPr id="50187929" name=""/>
           <p:cNvSpPr txBox="1"/>
           <p:nvPr/>
         </p:nvSpPr>
@@ -13745,7 +13745,7 @@
       </p:sp>
       <p:pic>
         <p:nvPicPr>
-          <p:cNvPr id="75308784" name=""/>
+          <p:cNvPr id="758755261" name=""/>
           <p:cNvPicPr>
             <a:picLocks noChangeAspect="1"/>
           </p:cNvPicPr>
@@ -13813,7 +13813,7 @@
       </p:grpSpPr>
       <p:sp>
         <p:nvSpPr>
-          <p:cNvPr id="1033401263" name="Rectangle 1407440435"/>
+          <p:cNvPr id="1228501809" name="Rectangle 1407440435"/>
           <p:cNvSpPr/>
           <p:nvPr/>
         </p:nvSpPr>
@@ -13869,16 +13869,16 @@
       </p:sp>
       <p:grpSp>
         <p:nvGrpSpPr>
-          <p:cNvPr id="1705644725" name=""/>
+          <p:cNvPr id="1470668456" name=""/>
           <p:cNvGrpSpPr/>
           <p:nvPr/>
         </p:nvGrpSpPr>
         <p:grpSpPr bwMode="auto">
           <a:xfrm>
             <a:off x="-1003545" y="6111"/>
-            <a:ext cx="13160467" cy="1374628"/>
+            <a:ext cx="13160467" cy="1374627"/>
             <a:chOff x="0" y="0"/>
-            <a:chExt cx="13160467" cy="1374628"/>
+            <a:chExt cx="13160467" cy="1374627"/>
           </a:xfrm>
         </p:grpSpPr>
         <p:sp>
@@ -13940,7 +13940,7 @@
           <p:spPr bwMode="auto">
             <a:xfrm rot="0" flipH="1" flipV="1">
               <a:off x="0" y="0"/>
-              <a:ext cx="979065" cy="1374628"/>
+              <a:ext cx="979065" cy="1374627"/>
             </a:xfrm>
             <a:prstGeom prst="chevron">
               <a:avLst>
@@ -13988,16 +13988,16 @@
       </p:grpSp>
       <p:grpSp>
         <p:nvGrpSpPr>
-          <p:cNvPr id="1535263596" name=""/>
+          <p:cNvPr id="1021882080" name=""/>
           <p:cNvGrpSpPr/>
           <p:nvPr/>
         </p:nvGrpSpPr>
         <p:grpSpPr bwMode="auto">
           <a:xfrm>
             <a:off x="9675144" y="1368567"/>
-            <a:ext cx="13160466" cy="1383771"/>
+            <a:ext cx="13160465" cy="1383771"/>
             <a:chOff x="0" y="0"/>
-            <a:chExt cx="13160466" cy="1383771"/>
+            <a:chExt cx="13160465" cy="1383771"/>
           </a:xfrm>
         </p:grpSpPr>
         <p:sp>
@@ -14059,7 +14059,7 @@
           <p:spPr bwMode="auto">
             <a:xfrm rot="0" flipH="0" flipV="1">
               <a:off x="12181401" y="0"/>
-              <a:ext cx="979065" cy="1374628"/>
+              <a:ext cx="979065" cy="1374627"/>
             </a:xfrm>
             <a:prstGeom prst="chevron">
               <a:avLst>
@@ -14110,16 +14110,16 @@
       </p:grpSp>
       <p:grpSp>
         <p:nvGrpSpPr>
-          <p:cNvPr id="532662245" name=""/>
+          <p:cNvPr id="1721259147" name=""/>
           <p:cNvGrpSpPr/>
           <p:nvPr/>
         </p:nvGrpSpPr>
         <p:grpSpPr bwMode="auto">
           <a:xfrm>
             <a:off x="-11032258" y="2743200"/>
-            <a:ext cx="13187930" cy="1374628"/>
+            <a:ext cx="13187930" cy="1374627"/>
             <a:chOff x="0" y="0"/>
-            <a:chExt cx="13187930" cy="1374628"/>
+            <a:chExt cx="13187930" cy="1374627"/>
           </a:xfrm>
         </p:grpSpPr>
         <p:sp>
@@ -14181,7 +14181,7 @@
           <p:spPr bwMode="auto">
             <a:xfrm rot="0" flipH="1" flipV="0">
               <a:off x="0" y="0"/>
-              <a:ext cx="979065" cy="1374628"/>
+              <a:ext cx="979065" cy="1374627"/>
             </a:xfrm>
             <a:prstGeom prst="chevron">
               <a:avLst>
@@ -14229,16 +14229,16 @@
       </p:grpSp>
       <p:grpSp>
         <p:nvGrpSpPr>
-          <p:cNvPr id="572791594" name=""/>
+          <p:cNvPr id="467265651" name=""/>
           <p:cNvGrpSpPr/>
           <p:nvPr/>
         </p:nvGrpSpPr>
         <p:grpSpPr bwMode="auto">
           <a:xfrm>
             <a:off x="9675144" y="4109005"/>
-            <a:ext cx="13160466" cy="1377390"/>
+            <a:ext cx="13160465" cy="1377390"/>
             <a:chOff x="0" y="0"/>
-            <a:chExt cx="13160466" cy="1377390"/>
+            <a:chExt cx="13160465" cy="1377390"/>
           </a:xfrm>
         </p:grpSpPr>
         <p:sp>
@@ -14300,7 +14300,7 @@
           <p:spPr bwMode="auto">
             <a:xfrm rot="0" flipH="0" flipV="1">
               <a:off x="12181401" y="0"/>
-              <a:ext cx="979065" cy="1374628"/>
+              <a:ext cx="979065" cy="1374627"/>
             </a:xfrm>
             <a:prstGeom prst="chevron">
               <a:avLst>
@@ -14348,16 +14348,16 @@
       </p:grpSp>
       <p:grpSp>
         <p:nvGrpSpPr>
-          <p:cNvPr id="604095591" name=""/>
+          <p:cNvPr id="11746009" name=""/>
           <p:cNvGrpSpPr/>
           <p:nvPr/>
         </p:nvGrpSpPr>
         <p:grpSpPr bwMode="auto">
           <a:xfrm>
             <a:off x="-11004795" y="5480605"/>
-            <a:ext cx="13160466" cy="1374628"/>
+            <a:ext cx="13160465" cy="1374627"/>
             <a:chOff x="0" y="0"/>
-            <a:chExt cx="13160466" cy="1374628"/>
+            <a:chExt cx="13160465" cy="1374627"/>
           </a:xfrm>
         </p:grpSpPr>
         <p:sp>
@@ -14419,7 +14419,7 @@
           <p:spPr bwMode="auto">
             <a:xfrm rot="0" flipH="1" flipV="0">
               <a:off x="0" y="0"/>
-              <a:ext cx="979065" cy="1374628"/>
+              <a:ext cx="979065" cy="1374627"/>
             </a:xfrm>
             <a:prstGeom prst="chevron">
               <a:avLst>
@@ -14467,7 +14467,7 @@
       </p:grpSp>
       <p:sp>
         <p:nvSpPr>
-          <p:cNvPr id="1923511526" name=""/>
+          <p:cNvPr id="282380270" name=""/>
           <p:cNvSpPr txBox="1"/>
           <p:nvPr/>
         </p:nvSpPr>
@@ -14512,7 +14512,7 @@
       </p:sp>
       <p:sp>
         <p:nvSpPr>
-          <p:cNvPr id="18864474" name=""/>
+          <p:cNvPr id="1054261172" name=""/>
           <p:cNvSpPr txBox="1"/>
           <p:nvPr/>
         </p:nvSpPr>
@@ -14563,7 +14563,7 @@
       </p:sp>
       <p:sp>
         <p:nvSpPr>
-          <p:cNvPr id="1380241505" name=""/>
+          <p:cNvPr id="912149651" name=""/>
           <p:cNvSpPr txBox="1"/>
           <p:nvPr/>
         </p:nvSpPr>
@@ -14619,7 +14619,7 @@
       </p:sp>
       <p:sp>
         <p:nvSpPr>
-          <p:cNvPr id="821921505" name=""/>
+          <p:cNvPr id="1296910636" name=""/>
           <p:cNvSpPr txBox="1"/>
           <p:nvPr/>
         </p:nvSpPr>
@@ -14688,7 +14688,7 @@
       </p:sp>
       <p:pic>
         <p:nvPicPr>
-          <p:cNvPr id="5391413" name=""/>
+          <p:cNvPr id="353280764" name=""/>
           <p:cNvPicPr>
             <a:picLocks noChangeAspect="1"/>
           </p:cNvPicPr>
@@ -14758,7 +14758,7 @@
                                           </p:stCondLst>
                                         </p:cTn>
                                         <p:tgtEl>
-                                          <p:spTgt spid="1380241505"/>
+                                          <p:spTgt spid="912149651"/>
                                         </p:tgtEl>
                                         <p:attrNameLst>
                                           <p:attrName>style.visibility</p:attrName>
@@ -14772,7 +14772,7 @@
                                       <p:cBhvr>
                                         <p:cTn id="17" dur="500"/>
                                         <p:tgtEl>
-                                          <p:spTgt spid="1380241505"/>
+                                          <p:spTgt spid="912149651"/>
                                         </p:tgtEl>
                                       </p:cBhvr>
                                     </p:animEffect>
@@ -14793,7 +14793,7 @@
                                           </p:stCondLst>
                                         </p:cTn>
                                         <p:tgtEl>
-                                          <p:spTgt spid="821921505"/>
+                                          <p:spTgt spid="1296910636"/>
                                         </p:tgtEl>
                                         <p:attrNameLst>
                                           <p:attrName>style.visibility</p:attrName>
@@ -14807,7 +14807,7 @@
                                       <p:cBhvr>
                                         <p:cTn id="14" dur="500"/>
                                         <p:tgtEl>
-                                          <p:spTgt spid="821921505"/>
+                                          <p:spTgt spid="1296910636"/>
                                         </p:tgtEl>
                                       </p:cBhvr>
                                     </p:animEffect>
@@ -14842,7 +14842,7 @@
                                       <p:cBhvr>
                                         <p:cTn id="10" dur="500"/>
                                         <p:tgtEl>
-                                          <p:spTgt spid="1380241505"/>
+                                          <p:spTgt spid="912149651"/>
                                         </p:tgtEl>
                                       </p:cBhvr>
                                     </p:animEffect>
@@ -14854,7 +14854,7 @@
                                           </p:stCondLst>
                                         </p:cTn>
                                         <p:tgtEl>
-                                          <p:spTgt spid="1380241505"/>
+                                          <p:spTgt spid="912149651"/>
                                         </p:tgtEl>
                                         <p:attrNameLst>
                                           <p:attrName>style.visibility</p:attrName>
@@ -14877,7 +14877,7 @@
                                       <p:cBhvr>
                                         <p:cTn id="7" dur="500"/>
                                         <p:tgtEl>
-                                          <p:spTgt spid="821921505"/>
+                                          <p:spTgt spid="1296910636"/>
                                         </p:tgtEl>
                                       </p:cBhvr>
                                     </p:animEffect>
@@ -14889,7 +14889,7 @@
                                           </p:stCondLst>
                                         </p:cTn>
                                         <p:tgtEl>
-                                          <p:spTgt spid="821921505"/>
+                                          <p:spTgt spid="1296910636"/>
                                         </p:tgtEl>
                                         <p:attrNameLst>
                                           <p:attrName>style.visibility</p:attrName>
@@ -14960,7 +14960,7 @@
       </p:grpSpPr>
       <p:sp>
         <p:nvSpPr>
-          <p:cNvPr id="696037725" name="Rectangle 1407440435"/>
+          <p:cNvPr id="1426268314" name="Rectangle 1407440435"/>
           <p:cNvSpPr/>
           <p:nvPr/>
         </p:nvSpPr>
@@ -15016,16 +15016,16 @@
       </p:sp>
       <p:grpSp>
         <p:nvGrpSpPr>
-          <p:cNvPr id="1192982207" name=""/>
+          <p:cNvPr id="897802966" name=""/>
           <p:cNvGrpSpPr/>
           <p:nvPr/>
         </p:nvGrpSpPr>
         <p:grpSpPr bwMode="auto">
           <a:xfrm>
             <a:off x="-1003545" y="6111"/>
-            <a:ext cx="13160467" cy="1374628"/>
+            <a:ext cx="13160467" cy="1374627"/>
             <a:chOff x="0" y="0"/>
-            <a:chExt cx="13160467" cy="1374628"/>
+            <a:chExt cx="13160467" cy="1374627"/>
           </a:xfrm>
         </p:grpSpPr>
         <p:sp>
@@ -15087,7 +15087,7 @@
           <p:spPr bwMode="auto">
             <a:xfrm rot="0" flipH="1" flipV="1">
               <a:off x="0" y="0"/>
-              <a:ext cx="979065" cy="1374628"/>
+              <a:ext cx="979065" cy="1374627"/>
             </a:xfrm>
             <a:prstGeom prst="chevron">
               <a:avLst>
@@ -15135,16 +15135,16 @@
       </p:grpSp>
       <p:grpSp>
         <p:nvGrpSpPr>
-          <p:cNvPr id="931187580" name=""/>
+          <p:cNvPr id="1160545236" name=""/>
           <p:cNvGrpSpPr/>
           <p:nvPr/>
         </p:nvGrpSpPr>
         <p:grpSpPr bwMode="auto">
           <a:xfrm>
             <a:off x="9675144" y="1368567"/>
-            <a:ext cx="13160466" cy="1383771"/>
+            <a:ext cx="13160465" cy="1383771"/>
             <a:chOff x="0" y="0"/>
-            <a:chExt cx="13160466" cy="1383771"/>
+            <a:chExt cx="13160465" cy="1383771"/>
           </a:xfrm>
         </p:grpSpPr>
         <p:sp>
@@ -15206,7 +15206,7 @@
           <p:spPr bwMode="auto">
             <a:xfrm rot="0" flipH="0" flipV="1">
               <a:off x="12181401" y="0"/>
-              <a:ext cx="979065" cy="1374628"/>
+              <a:ext cx="979065" cy="1374627"/>
             </a:xfrm>
             <a:prstGeom prst="chevron">
               <a:avLst>
@@ -15257,16 +15257,16 @@
       </p:grpSp>
       <p:grpSp>
         <p:nvGrpSpPr>
-          <p:cNvPr id="472433546" name=""/>
+          <p:cNvPr id="1443808273" name=""/>
           <p:cNvGrpSpPr/>
           <p:nvPr/>
         </p:nvGrpSpPr>
         <p:grpSpPr bwMode="auto">
           <a:xfrm>
             <a:off x="-11032258" y="2743200"/>
-            <a:ext cx="13187930" cy="1374628"/>
+            <a:ext cx="13187930" cy="1374627"/>
             <a:chOff x="0" y="0"/>
-            <a:chExt cx="13187930" cy="1374628"/>
+            <a:chExt cx="13187930" cy="1374627"/>
           </a:xfrm>
         </p:grpSpPr>
         <p:sp>
@@ -15328,7 +15328,7 @@
           <p:spPr bwMode="auto">
             <a:xfrm rot="0" flipH="1" flipV="0">
               <a:off x="0" y="0"/>
-              <a:ext cx="979065" cy="1374628"/>
+              <a:ext cx="979065" cy="1374627"/>
             </a:xfrm>
             <a:prstGeom prst="chevron">
               <a:avLst>
@@ -15376,16 +15376,16 @@
       </p:grpSp>
       <p:grpSp>
         <p:nvGrpSpPr>
-          <p:cNvPr id="1991321154" name=""/>
+          <p:cNvPr id="445302845" name=""/>
           <p:cNvGrpSpPr/>
           <p:nvPr/>
         </p:nvGrpSpPr>
         <p:grpSpPr bwMode="auto">
           <a:xfrm>
             <a:off x="9675144" y="4109005"/>
-            <a:ext cx="13160466" cy="1377390"/>
+            <a:ext cx="13160465" cy="1377390"/>
             <a:chOff x="0" y="0"/>
-            <a:chExt cx="13160466" cy="1377390"/>
+            <a:chExt cx="13160465" cy="1377390"/>
           </a:xfrm>
         </p:grpSpPr>
         <p:sp>
@@ -15447,7 +15447,7 @@
           <p:spPr bwMode="auto">
             <a:xfrm rot="0" flipH="0" flipV="1">
               <a:off x="12181401" y="0"/>
-              <a:ext cx="979065" cy="1374628"/>
+              <a:ext cx="979065" cy="1374627"/>
             </a:xfrm>
             <a:prstGeom prst="chevron">
               <a:avLst>
@@ -15495,16 +15495,16 @@
       </p:grpSp>
       <p:grpSp>
         <p:nvGrpSpPr>
-          <p:cNvPr id="1587994030" name=""/>
+          <p:cNvPr id="1346105841" name=""/>
           <p:cNvGrpSpPr/>
           <p:nvPr/>
         </p:nvGrpSpPr>
         <p:grpSpPr bwMode="auto">
           <a:xfrm>
             <a:off x="-11004795" y="5480605"/>
-            <a:ext cx="13160466" cy="1374628"/>
+            <a:ext cx="13160465" cy="1374627"/>
             <a:chOff x="0" y="0"/>
-            <a:chExt cx="13160466" cy="1374628"/>
+            <a:chExt cx="13160465" cy="1374627"/>
           </a:xfrm>
         </p:grpSpPr>
         <p:sp>
@@ -15566,7 +15566,7 @@
           <p:spPr bwMode="auto">
             <a:xfrm rot="0" flipH="1" flipV="0">
               <a:off x="0" y="0"/>
-              <a:ext cx="979065" cy="1374628"/>
+              <a:ext cx="979065" cy="1374627"/>
             </a:xfrm>
             <a:prstGeom prst="chevron">
               <a:avLst>
@@ -15614,7 +15614,7 @@
       </p:grpSp>
       <p:sp>
         <p:nvSpPr>
-          <p:cNvPr id="1851940562" name=""/>
+          <p:cNvPr id="1179134025" name=""/>
           <p:cNvSpPr txBox="1"/>
           <p:nvPr/>
         </p:nvSpPr>
@@ -15659,7 +15659,7 @@
       </p:sp>
       <p:sp>
         <p:nvSpPr>
-          <p:cNvPr id="382982465" name=""/>
+          <p:cNvPr id="784504708" name=""/>
           <p:cNvSpPr txBox="1"/>
           <p:nvPr/>
         </p:nvSpPr>
@@ -15710,7 +15710,7 @@
       </p:sp>
       <p:pic>
         <p:nvPicPr>
-          <p:cNvPr id="1299710061" name=""/>
+          <p:cNvPr id="1111945857" name=""/>
           <p:cNvPicPr>
             <a:picLocks noChangeAspect="1"/>
           </p:cNvPicPr>
@@ -15732,7 +15732,7 @@
       </p:pic>
       <p:sp>
         <p:nvSpPr>
-          <p:cNvPr id="1906519889" name=""/>
+          <p:cNvPr id="945563494" name=""/>
           <p:cNvSpPr txBox="1"/>
           <p:nvPr/>
         </p:nvSpPr>
@@ -15777,7 +15777,7 @@
       </p:sp>
       <p:sp>
         <p:nvSpPr>
-          <p:cNvPr id="338790187" name=""/>
+          <p:cNvPr id="578604773" name=""/>
           <p:cNvSpPr txBox="1"/>
           <p:nvPr/>
         </p:nvSpPr>
@@ -15822,7 +15822,7 @@
       </p:sp>
       <p:sp>
         <p:nvSpPr>
-          <p:cNvPr id="1279200529" name=""/>
+          <p:cNvPr id="1227590988" name=""/>
           <p:cNvSpPr txBox="1"/>
           <p:nvPr/>
         </p:nvSpPr>
@@ -15915,7 +15915,7 @@
                                           </p:stCondLst>
                                         </p:cTn>
                                         <p:tgtEl>
-                                          <p:spTgt spid="1906519889"/>
+                                          <p:spTgt spid="945563494"/>
                                         </p:tgtEl>
                                         <p:attrNameLst>
                                           <p:attrName>style.visibility</p:attrName>
@@ -15929,7 +15929,7 @@
                                       <p:cBhvr>
                                         <p:cTn id="23" dur="500"/>
                                         <p:tgtEl>
-                                          <p:spTgt spid="1906519889"/>
+                                          <p:spTgt spid="945563494"/>
                                         </p:tgtEl>
                                       </p:cBhvr>
                                     </p:animEffect>
@@ -15950,7 +15950,7 @@
                                           </p:stCondLst>
                                         </p:cTn>
                                         <p:tgtEl>
-                                          <p:spTgt spid="338790187"/>
+                                          <p:spTgt spid="578604773"/>
                                         </p:tgtEl>
                                         <p:attrNameLst>
                                           <p:attrName>style.visibility</p:attrName>
@@ -15964,7 +15964,7 @@
                                       <p:cBhvr>
                                         <p:cTn id="20" dur="500"/>
                                         <p:tgtEl>
-                                          <p:spTgt spid="338790187"/>
+                                          <p:spTgt spid="578604773"/>
                                         </p:tgtEl>
                                       </p:cBhvr>
                                     </p:animEffect>
@@ -15985,7 +15985,7 @@
                                           </p:stCondLst>
                                         </p:cTn>
                                         <p:tgtEl>
-                                          <p:spTgt spid="1279200529"/>
+                                          <p:spTgt spid="1227590988"/>
                                         </p:tgtEl>
                                         <p:attrNameLst>
                                           <p:attrName>style.visibility</p:attrName>
@@ -15999,7 +15999,7 @@
                                       <p:cBhvr>
                                         <p:cTn id="17" dur="500"/>
                                         <p:tgtEl>
-                                          <p:spTgt spid="1279200529"/>
+                                          <p:spTgt spid="1227590988"/>
                                         </p:tgtEl>
                                       </p:cBhvr>
                                     </p:animEffect>
@@ -16034,7 +16034,7 @@
                                       <p:cBhvr>
                                         <p:cTn id="6" dur="500"/>
                                         <p:tgtEl>
-                                          <p:spTgt spid="1906519889"/>
+                                          <p:spTgt spid="945563494"/>
                                         </p:tgtEl>
                                       </p:cBhvr>
                                     </p:animEffect>
@@ -16046,7 +16046,7 @@
                                           </p:stCondLst>
                                         </p:cTn>
                                         <p:tgtEl>
-                                          <p:spTgt spid="1906519889"/>
+                                          <p:spTgt spid="945563494"/>
                                         </p:tgtEl>
                                         <p:attrNameLst>
                                           <p:attrName>style.visibility</p:attrName>
@@ -16069,7 +16069,7 @@
                                       <p:cBhvr>
                                         <p:cTn id="6" dur="500"/>
                                         <p:tgtEl>
-                                          <p:spTgt spid="338790187"/>
+                                          <p:spTgt spid="578604773"/>
                                         </p:tgtEl>
                                       </p:cBhvr>
                                     </p:animEffect>
@@ -16081,7 +16081,7 @@
                                           </p:stCondLst>
                                         </p:cTn>
                                         <p:tgtEl>
-                                          <p:spTgt spid="338790187"/>
+                                          <p:spTgt spid="578604773"/>
                                         </p:tgtEl>
                                         <p:attrNameLst>
                                           <p:attrName>style.visibility</p:attrName>
@@ -16104,7 +16104,7 @@
                                       <p:cBhvr>
                                         <p:cTn id="6" dur="500"/>
                                         <p:tgtEl>
-                                          <p:spTgt spid="1279200529"/>
+                                          <p:spTgt spid="1227590988"/>
                                         </p:tgtEl>
                                       </p:cBhvr>
                                     </p:animEffect>
@@ -16116,7 +16116,7 @@
                                           </p:stCondLst>
                                         </p:cTn>
                                         <p:tgtEl>
-                                          <p:spTgt spid="1279200529"/>
+                                          <p:spTgt spid="1227590988"/>
                                         </p:tgtEl>
                                         <p:attrNameLst>
                                           <p:attrName>style.visibility</p:attrName>
@@ -16187,7 +16187,7 @@
       </p:grpSpPr>
       <p:sp>
         <p:nvSpPr>
-          <p:cNvPr id="1272406269" name="Rectangle 1407440435"/>
+          <p:cNvPr id="576997507" name="Rectangle 1407440435"/>
           <p:cNvSpPr/>
           <p:nvPr/>
         </p:nvSpPr>
@@ -16243,16 +16243,16 @@
       </p:sp>
       <p:grpSp>
         <p:nvGrpSpPr>
-          <p:cNvPr id="790872199" name=""/>
+          <p:cNvPr id="452293059" name=""/>
           <p:cNvGrpSpPr/>
           <p:nvPr/>
         </p:nvGrpSpPr>
         <p:grpSpPr bwMode="auto">
           <a:xfrm>
             <a:off x="-1003545" y="6111"/>
-            <a:ext cx="13160467" cy="1374628"/>
+            <a:ext cx="13160467" cy="1374627"/>
             <a:chOff x="0" y="0"/>
-            <a:chExt cx="13160467" cy="1374628"/>
+            <a:chExt cx="13160467" cy="1374627"/>
           </a:xfrm>
         </p:grpSpPr>
         <p:sp>
@@ -16314,7 +16314,7 @@
           <p:spPr bwMode="auto">
             <a:xfrm rot="0" flipH="1" flipV="1">
               <a:off x="0" y="0"/>
-              <a:ext cx="979065" cy="1374628"/>
+              <a:ext cx="979065" cy="1374627"/>
             </a:xfrm>
             <a:prstGeom prst="chevron">
               <a:avLst>
@@ -16362,16 +16362,16 @@
       </p:grpSp>
       <p:grpSp>
         <p:nvGrpSpPr>
-          <p:cNvPr id="1330173238" name=""/>
+          <p:cNvPr id="1596307071" name=""/>
           <p:cNvGrpSpPr/>
           <p:nvPr/>
         </p:nvGrpSpPr>
         <p:grpSpPr bwMode="auto">
           <a:xfrm>
             <a:off x="9675144" y="1368567"/>
-            <a:ext cx="13160466" cy="1383771"/>
+            <a:ext cx="13160465" cy="1383771"/>
             <a:chOff x="0" y="0"/>
-            <a:chExt cx="13160466" cy="1383771"/>
+            <a:chExt cx="13160465" cy="1383771"/>
           </a:xfrm>
         </p:grpSpPr>
         <p:sp>
@@ -16433,7 +16433,7 @@
           <p:spPr bwMode="auto">
             <a:xfrm rot="0" flipH="0" flipV="1">
               <a:off x="12181401" y="0"/>
-              <a:ext cx="979065" cy="1374628"/>
+              <a:ext cx="979065" cy="1374627"/>
             </a:xfrm>
             <a:prstGeom prst="chevron">
               <a:avLst>
@@ -16484,16 +16484,16 @@
       </p:grpSp>
       <p:grpSp>
         <p:nvGrpSpPr>
-          <p:cNvPr id="303543113" name=""/>
+          <p:cNvPr id="994622974" name=""/>
           <p:cNvGrpSpPr/>
           <p:nvPr/>
         </p:nvGrpSpPr>
         <p:grpSpPr bwMode="auto">
           <a:xfrm>
             <a:off x="-11032258" y="2743200"/>
-            <a:ext cx="13187930" cy="1374628"/>
+            <a:ext cx="13187930" cy="1374627"/>
             <a:chOff x="0" y="0"/>
-            <a:chExt cx="13187930" cy="1374628"/>
+            <a:chExt cx="13187930" cy="1374627"/>
           </a:xfrm>
         </p:grpSpPr>
         <p:sp>
@@ -16555,7 +16555,7 @@
           <p:spPr bwMode="auto">
             <a:xfrm rot="0" flipH="1" flipV="0">
               <a:off x="0" y="0"/>
-              <a:ext cx="979065" cy="1374628"/>
+              <a:ext cx="979065" cy="1374627"/>
             </a:xfrm>
             <a:prstGeom prst="chevron">
               <a:avLst>
@@ -16603,16 +16603,16 @@
       </p:grpSp>
       <p:grpSp>
         <p:nvGrpSpPr>
-          <p:cNvPr id="31076124" name=""/>
+          <p:cNvPr id="839116716" name=""/>
           <p:cNvGrpSpPr/>
           <p:nvPr/>
         </p:nvGrpSpPr>
         <p:grpSpPr bwMode="auto">
           <a:xfrm>
             <a:off x="9675144" y="4109005"/>
-            <a:ext cx="13160466" cy="1377390"/>
+            <a:ext cx="13160465" cy="1377390"/>
             <a:chOff x="0" y="0"/>
-            <a:chExt cx="13160466" cy="1377390"/>
+            <a:chExt cx="13160465" cy="1377390"/>
           </a:xfrm>
         </p:grpSpPr>
         <p:sp>
@@ -16674,7 +16674,7 @@
           <p:spPr bwMode="auto">
             <a:xfrm rot="0" flipH="0" flipV="1">
               <a:off x="12181401" y="0"/>
-              <a:ext cx="979065" cy="1374628"/>
+              <a:ext cx="979065" cy="1374627"/>
             </a:xfrm>
             <a:prstGeom prst="chevron">
               <a:avLst>
@@ -16722,16 +16722,16 @@
       </p:grpSp>
       <p:grpSp>
         <p:nvGrpSpPr>
-          <p:cNvPr id="834182732" name=""/>
+          <p:cNvPr id="1928484223" name=""/>
           <p:cNvGrpSpPr/>
           <p:nvPr/>
         </p:nvGrpSpPr>
         <p:grpSpPr bwMode="auto">
           <a:xfrm>
             <a:off x="-11004795" y="5480605"/>
-            <a:ext cx="13160466" cy="1374628"/>
+            <a:ext cx="13160465" cy="1374627"/>
             <a:chOff x="0" y="0"/>
-            <a:chExt cx="13160466" cy="1374628"/>
+            <a:chExt cx="13160465" cy="1374627"/>
           </a:xfrm>
         </p:grpSpPr>
         <p:sp>
@@ -16793,7 +16793,7 @@
           <p:spPr bwMode="auto">
             <a:xfrm rot="0" flipH="1" flipV="0">
               <a:off x="0" y="0"/>
-              <a:ext cx="979065" cy="1374628"/>
+              <a:ext cx="979065" cy="1374627"/>
             </a:xfrm>
             <a:prstGeom prst="chevron">
               <a:avLst>
@@ -16841,7 +16841,7 @@
       </p:grpSp>
       <p:sp>
         <p:nvSpPr>
-          <p:cNvPr id="464804646" name=""/>
+          <p:cNvPr id="414375566" name=""/>
           <p:cNvSpPr txBox="1"/>
           <p:nvPr/>
         </p:nvSpPr>
@@ -16886,7 +16886,7 @@
       </p:sp>
       <p:sp>
         <p:nvSpPr>
-          <p:cNvPr id="964527492" name=""/>
+          <p:cNvPr id="6366589" name=""/>
           <p:cNvSpPr txBox="1"/>
           <p:nvPr/>
         </p:nvSpPr>
@@ -16937,7 +16937,7 @@
       </p:sp>
       <p:pic>
         <p:nvPicPr>
-          <p:cNvPr id="1416821514" name=""/>
+          <p:cNvPr id="1676994851" name=""/>
           <p:cNvPicPr>
             <a:picLocks noChangeAspect="1"/>
           </p:cNvPicPr>
@@ -16959,7 +16959,7 @@
       </p:pic>
       <p:sp>
         <p:nvSpPr>
-          <p:cNvPr id="446280989" name=""/>
+          <p:cNvPr id="1019340139" name=""/>
           <p:cNvSpPr txBox="1"/>
           <p:nvPr/>
         </p:nvSpPr>
@@ -17014,7 +17014,7 @@
       </p:sp>
       <p:sp>
         <p:nvSpPr>
-          <p:cNvPr id="1857882370" name=""/>
+          <p:cNvPr id="1215794854" name=""/>
           <p:cNvSpPr txBox="1"/>
           <p:nvPr/>
         </p:nvSpPr>
@@ -17122,7 +17122,7 @@
       </p:grpSpPr>
       <p:sp>
         <p:nvSpPr>
-          <p:cNvPr id="1963757163" name=""/>
+          <p:cNvPr id="1935477254" name=""/>
           <p:cNvSpPr/>
           <p:nvPr/>
         </p:nvSpPr>
@@ -17166,7 +17166,7 @@
       </p:sp>
       <p:sp>
         <p:nvSpPr>
-          <p:cNvPr id="157153614" name=""/>
+          <p:cNvPr id="2139693740" name=""/>
           <p:cNvSpPr txBox="1"/>
           <p:nvPr/>
         </p:nvSpPr>
@@ -17219,7 +17219,7 @@
       </p:sp>
       <p:pic>
         <p:nvPicPr>
-          <p:cNvPr id="1297530196" name=""/>
+          <p:cNvPr id="635813086" name=""/>
           <p:cNvPicPr>
             <a:picLocks noChangeAspect="1"/>
           </p:cNvPicPr>
@@ -17241,7 +17241,7 @@
       </p:pic>
       <p:sp>
         <p:nvSpPr>
-          <p:cNvPr id="1521996933" name=""/>
+          <p:cNvPr id="587193849" name=""/>
           <p:cNvSpPr txBox="1"/>
           <p:nvPr/>
         </p:nvSpPr>
@@ -17295,7 +17295,7 @@
       </p:sp>
       <p:sp>
         <p:nvSpPr>
-          <p:cNvPr id="1207189436" name=""/>
+          <p:cNvPr id="853064892" name=""/>
           <p:cNvSpPr txBox="1"/>
           <p:nvPr/>
         </p:nvSpPr>
@@ -17387,7 +17387,7 @@
                                           </p:stCondLst>
                                         </p:cTn>
                                         <p:tgtEl>
-                                          <p:spTgt spid="1297530196"/>
+                                          <p:spTgt spid="635813086"/>
                                         </p:tgtEl>
                                         <p:attrNameLst>
                                           <p:attrName>style.visibility</p:attrName>
@@ -17401,7 +17401,7 @@
                                       <p:cBhvr>
                                         <p:cTn id="15" dur="500"/>
                                         <p:tgtEl>
-                                          <p:spTgt spid="1297530196"/>
+                                          <p:spTgt spid="635813086"/>
                                         </p:tgtEl>
                                       </p:cBhvr>
                                     </p:animEffect>
@@ -17422,7 +17422,7 @@
                                           </p:stCondLst>
                                         </p:cTn>
                                         <p:tgtEl>
-                                          <p:spTgt spid="1521996933"/>
+                                          <p:spTgt spid="587193849"/>
                                         </p:tgtEl>
                                         <p:attrNameLst>
                                           <p:attrName>style.visibility</p:attrName>
@@ -17436,7 +17436,7 @@
                                       <p:cBhvr>
                                         <p:cTn id="12" dur="500"/>
                                         <p:tgtEl>
-                                          <p:spTgt spid="1521996933"/>
+                                          <p:spTgt spid="587193849"/>
                                         </p:tgtEl>
                                       </p:cBhvr>
                                     </p:animEffect>
@@ -17457,7 +17457,7 @@
                                           </p:stCondLst>
                                         </p:cTn>
                                         <p:tgtEl>
-                                          <p:spTgt spid="1207189436"/>
+                                          <p:spTgt spid="853064892"/>
                                         </p:tgtEl>
                                         <p:attrNameLst>
                                           <p:attrName>style.visibility</p:attrName>
@@ -17471,7 +17471,7 @@
                                       <p:cBhvr>
                                         <p:cTn id="9" dur="500"/>
                                         <p:tgtEl>
-                                          <p:spTgt spid="1207189436"/>
+                                          <p:spTgt spid="853064892"/>
                                         </p:tgtEl>
                                       </p:cBhvr>
                                     </p:animEffect>
@@ -17492,7 +17492,7 @@
                                           </p:stCondLst>
                                         </p:cTn>
                                         <p:tgtEl>
-                                          <p:spTgt spid="157153614"/>
+                                          <p:spTgt spid="2139693740"/>
                                         </p:tgtEl>
                                         <p:attrNameLst>
                                           <p:attrName>style.visibility</p:attrName>
@@ -17506,7 +17506,7 @@
                                       <p:cBhvr>
                                         <p:cTn id="6" dur="500"/>
                                         <p:tgtEl>
-                                          <p:spTgt spid="157153614"/>
+                                          <p:spTgt spid="2139693740"/>
                                         </p:tgtEl>
                                       </p:cBhvr>
                                     </p:animEffect>
@@ -17571,7 +17571,7 @@
       </p:grpSpPr>
       <p:sp>
         <p:nvSpPr>
-          <p:cNvPr id="359862209" name=""/>
+          <p:cNvPr id="1970692213" name=""/>
           <p:cNvSpPr/>
           <p:nvPr/>
         </p:nvSpPr>
@@ -17615,7 +17615,7 @@
       </p:sp>
       <p:pic>
         <p:nvPicPr>
-          <p:cNvPr id="828508433" name=""/>
+          <p:cNvPr id="278720403" name=""/>
           <p:cNvPicPr>
             <a:picLocks noChangeAspect="1"/>
           </p:cNvPicPr>
@@ -17637,7 +17637,7 @@
       </p:pic>
       <p:sp>
         <p:nvSpPr>
-          <p:cNvPr id="1067890437" name=""/>
+          <p:cNvPr id="1174962328" name=""/>
           <p:cNvSpPr txBox="1"/>
           <p:nvPr/>
         </p:nvSpPr>
@@ -17691,7 +17691,7 @@
       </p:sp>
       <p:sp>
         <p:nvSpPr>
-          <p:cNvPr id="1532678691" name=""/>
+          <p:cNvPr id="1535661501" name=""/>
           <p:cNvSpPr txBox="1"/>
           <p:nvPr/>
         </p:nvSpPr>
@@ -17735,7 +17735,7 @@
       </p:sp>
       <p:sp>
         <p:nvSpPr>
-          <p:cNvPr id="838575806" name=""/>
+          <p:cNvPr id="1143281424" name=""/>
           <p:cNvSpPr txBox="1"/>
           <p:nvPr/>
         </p:nvSpPr>
@@ -17830,7 +17830,7 @@
       </p:grpSpPr>
       <p:sp>
         <p:nvSpPr>
-          <p:cNvPr id="1606332956" name=""/>
+          <p:cNvPr id="1812347832" name=""/>
           <p:cNvSpPr/>
           <p:nvPr/>
         </p:nvSpPr>
@@ -17874,7 +17874,7 @@
       </p:sp>
       <p:pic>
         <p:nvPicPr>
-          <p:cNvPr id="1463221645" name=""/>
+          <p:cNvPr id="1518006077" name=""/>
           <p:cNvPicPr>
             <a:picLocks noChangeAspect="1"/>
           </p:cNvPicPr>
@@ -17896,7 +17896,7 @@
       </p:pic>
       <p:sp>
         <p:nvSpPr>
-          <p:cNvPr id="1659655049" name=""/>
+          <p:cNvPr id="1132113432" name=""/>
           <p:cNvSpPr txBox="1"/>
           <p:nvPr/>
         </p:nvSpPr>
@@ -17950,7 +17950,7 @@
       </p:sp>
       <p:sp>
         <p:nvSpPr>
-          <p:cNvPr id="1108423722" name=""/>
+          <p:cNvPr id="2035567754" name=""/>
           <p:cNvSpPr txBox="1"/>
           <p:nvPr/>
         </p:nvSpPr>
@@ -17994,7 +17994,7 @@
       </p:sp>
       <p:sp>
         <p:nvSpPr>
-          <p:cNvPr id="1158593095" name=""/>
+          <p:cNvPr id="427547392" name=""/>
           <p:cNvSpPr txBox="1"/>
           <p:nvPr/>
         </p:nvSpPr>
@@ -18047,7 +18047,7 @@
       </p:sp>
       <p:sp>
         <p:nvSpPr>
-          <p:cNvPr id="104386853" name=""/>
+          <p:cNvPr id="1384778183" name=""/>
           <p:cNvSpPr txBox="1"/>
           <p:nvPr/>
         </p:nvSpPr>
@@ -18103,7 +18103,7 @@
       </p:sp>
       <p:sp>
         <p:nvSpPr>
-          <p:cNvPr id="1052521697" name=""/>
+          <p:cNvPr id="1911977859" name=""/>
           <p:cNvSpPr txBox="1"/>
           <p:nvPr/>
         </p:nvSpPr>
@@ -18157,7 +18157,7 @@
       </p:sp>
       <p:sp>
         <p:nvSpPr>
-          <p:cNvPr id="322688665" name=""/>
+          <p:cNvPr id="355555208" name=""/>
           <p:cNvSpPr txBox="1"/>
           <p:nvPr/>
         </p:nvSpPr>
@@ -18211,7 +18211,7 @@
       </p:sp>
       <p:pic>
         <p:nvPicPr>
-          <p:cNvPr id="1580477989" name=""/>
+          <p:cNvPr id="301015246" name=""/>
           <p:cNvPicPr>
             <a:picLocks noChangeAspect="1"/>
           </p:cNvPicPr>
@@ -18285,7 +18285,7 @@
                                           </p:stCondLst>
                                         </p:cTn>
                                         <p:tgtEl>
-                                          <p:spTgt spid="104386853"/>
+                                          <p:spTgt spid="1384778183"/>
                                         </p:tgtEl>
                                         <p:attrNameLst>
                                           <p:attrName>style.visibility</p:attrName>
@@ -18299,7 +18299,7 @@
                                       <p:cBhvr>
                                         <p:cTn id="15" dur="500"/>
                                         <p:tgtEl>
-                                          <p:spTgt spid="104386853"/>
+                                          <p:spTgt spid="1384778183"/>
                                         </p:tgtEl>
                                       </p:cBhvr>
                                     </p:animEffect>
@@ -18320,7 +18320,7 @@
                                           </p:stCondLst>
                                         </p:cTn>
                                         <p:tgtEl>
-                                          <p:spTgt spid="1052521697"/>
+                                          <p:spTgt spid="1911977859"/>
                                         </p:tgtEl>
                                         <p:attrNameLst>
                                           <p:attrName>style.visibility</p:attrName>
@@ -18334,7 +18334,7 @@
                                       <p:cBhvr>
                                         <p:cTn id="12" dur="500"/>
                                         <p:tgtEl>
-                                          <p:spTgt spid="1052521697"/>
+                                          <p:spTgt spid="1911977859"/>
                                         </p:tgtEl>
                                       </p:cBhvr>
                                     </p:animEffect>
@@ -18355,7 +18355,7 @@
                                           </p:stCondLst>
                                         </p:cTn>
                                         <p:tgtEl>
-                                          <p:spTgt spid="322688665"/>
+                                          <p:spTgt spid="355555208"/>
                                         </p:tgtEl>
                                         <p:attrNameLst>
                                           <p:attrName>style.visibility</p:attrName>
@@ -18369,7 +18369,7 @@
                                       <p:cBhvr>
                                         <p:cTn id="9" dur="500"/>
                                         <p:tgtEl>
-                                          <p:spTgt spid="322688665"/>
+                                          <p:spTgt spid="355555208"/>
                                         </p:tgtEl>
                                       </p:cBhvr>
                                     </p:animEffect>
@@ -18390,7 +18390,7 @@
                                           </p:stCondLst>
                                         </p:cTn>
                                         <p:tgtEl>
-                                          <p:spTgt spid="1580477989"/>
+                                          <p:spTgt spid="301015246"/>
                                         </p:tgtEl>
                                         <p:attrNameLst>
                                           <p:attrName>style.visibility</p:attrName>
@@ -18404,7 +18404,7 @@
                                       <p:cBhvr>
                                         <p:cTn id="7" dur="500"/>
                                         <p:tgtEl>
-                                          <p:spTgt spid="1580477989"/>
+                                          <p:spTgt spid="301015246"/>
                                         </p:tgtEl>
                                       </p:cBhvr>
                                     </p:animEffect>
@@ -18469,7 +18469,7 @@
       </p:grpSpPr>
       <p:sp>
         <p:nvSpPr>
-          <p:cNvPr id="771161134" name=""/>
+          <p:cNvPr id="274402119" name=""/>
           <p:cNvSpPr/>
           <p:nvPr/>
         </p:nvSpPr>
@@ -18513,7 +18513,7 @@
       </p:sp>
       <p:sp>
         <p:nvSpPr>
-          <p:cNvPr id="238026835" name=""/>
+          <p:cNvPr id="119785258" name=""/>
           <p:cNvSpPr txBox="1"/>
           <p:nvPr/>
         </p:nvSpPr>
@@ -18557,7 +18557,7 @@
       </p:sp>
       <p:pic>
         <p:nvPicPr>
-          <p:cNvPr id="1067735649" name=""/>
+          <p:cNvPr id="1740902633" name=""/>
           <p:cNvPicPr>
             <a:picLocks noChangeAspect="1"/>
           </p:cNvPicPr>
@@ -18579,7 +18579,7 @@
       </p:pic>
       <p:sp>
         <p:nvSpPr>
-          <p:cNvPr id="1757944554" name=""/>
+          <p:cNvPr id="882252939" name=""/>
           <p:cNvSpPr txBox="1"/>
           <p:nvPr/>
         </p:nvSpPr>
@@ -18635,7 +18635,7 @@
       </p:sp>
       <p:sp>
         <p:nvSpPr>
-          <p:cNvPr id="145073308" name=""/>
+          <p:cNvPr id="2062221335" name=""/>
           <p:cNvSpPr txBox="1"/>
           <p:nvPr/>
         </p:nvSpPr>
@@ -18689,7 +18689,7 @@
       </p:sp>
       <p:sp>
         <p:nvSpPr>
-          <p:cNvPr id="701379894" name=""/>
+          <p:cNvPr id="1484060052" name=""/>
           <p:cNvSpPr txBox="1"/>
           <p:nvPr/>
         </p:nvSpPr>
@@ -18785,7 +18785,7 @@
       </p:grpSpPr>
       <p:sp>
         <p:nvSpPr>
-          <p:cNvPr id="1229695004" name=""/>
+          <p:cNvPr id="1841733072" name=""/>
           <p:cNvSpPr/>
           <p:nvPr/>
         </p:nvSpPr>
@@ -18829,7 +18829,7 @@
       </p:sp>
       <p:sp>
         <p:nvSpPr>
-          <p:cNvPr id="1282845183" name=""/>
+          <p:cNvPr id="276407541" name=""/>
           <p:cNvSpPr txBox="1"/>
           <p:nvPr/>
         </p:nvSpPr>
@@ -18873,7 +18873,7 @@
       </p:sp>
       <p:pic>
         <p:nvPicPr>
-          <p:cNvPr id="1042670811" name=""/>
+          <p:cNvPr id="1698946966" name=""/>
           <p:cNvPicPr>
             <a:picLocks noChangeAspect="1"/>
           </p:cNvPicPr>
@@ -18895,7 +18895,7 @@
       </p:pic>
       <p:sp>
         <p:nvSpPr>
-          <p:cNvPr id="1424797811" name=""/>
+          <p:cNvPr id="649645319" name=""/>
           <p:cNvSpPr txBox="1"/>
           <p:nvPr/>
         </p:nvSpPr>
@@ -18951,7 +18951,7 @@
       </p:sp>
       <p:sp>
         <p:nvSpPr>
-          <p:cNvPr id="1650734772" name=""/>
+          <p:cNvPr id="1493390296" name=""/>
           <p:cNvSpPr txBox="1"/>
           <p:nvPr/>
         </p:nvSpPr>
@@ -19005,7 +19005,7 @@
       </p:sp>
       <p:sp>
         <p:nvSpPr>
-          <p:cNvPr id="377560947" name=""/>
+          <p:cNvPr id="62553013" name=""/>
           <p:cNvSpPr txBox="1"/>
           <p:nvPr/>
         </p:nvSpPr>
@@ -19105,7 +19105,7 @@
       </p:grpSpPr>
       <p:sp>
         <p:nvSpPr>
-          <p:cNvPr id="1708522562" name=""/>
+          <p:cNvPr id="760835212" name=""/>
           <p:cNvSpPr/>
           <p:nvPr/>
         </p:nvSpPr>
@@ -19161,7 +19161,7 @@
       </p:sp>
       <p:sp>
         <p:nvSpPr>
-          <p:cNvPr id="57685875" name=""/>
+          <p:cNvPr id="961265818" name=""/>
           <p:cNvSpPr txBox="1"/>
           <p:nvPr/>
         </p:nvSpPr>
@@ -19206,7 +19206,7 @@
       </p:sp>
       <p:pic>
         <p:nvPicPr>
-          <p:cNvPr id="672982938" name=""/>
+          <p:cNvPr id="1156836007" name=""/>
           <p:cNvPicPr>
             <a:picLocks noChangeAspect="1"/>
           </p:cNvPicPr>
@@ -19228,7 +19228,7 @@
       </p:pic>
       <p:sp>
         <p:nvSpPr>
-          <p:cNvPr id="650494771" name=""/>
+          <p:cNvPr id="77060783" name=""/>
           <p:cNvSpPr txBox="1"/>
           <p:nvPr/>
         </p:nvSpPr>
@@ -19284,7 +19284,7 @@
       </p:sp>
       <p:sp>
         <p:nvSpPr>
-          <p:cNvPr id="979416757" name=""/>
+          <p:cNvPr id="2042723679" name=""/>
           <p:cNvSpPr txBox="1"/>
           <p:nvPr/>
         </p:nvSpPr>
@@ -19340,7 +19340,7 @@
       </p:sp>
       <p:sp>
         <p:nvSpPr>
-          <p:cNvPr id="329367616" name=""/>
+          <p:cNvPr id="1206204269" name=""/>
           <p:cNvSpPr txBox="1"/>
           <p:nvPr/>
         </p:nvSpPr>
@@ -19396,7 +19396,7 @@
       </p:sp>
       <p:sp>
         <p:nvSpPr>
-          <p:cNvPr id="1573993130" name=""/>
+          <p:cNvPr id="1422491601" name=""/>
           <p:cNvSpPr txBox="1"/>
           <p:nvPr/>
         </p:nvSpPr>
@@ -19542,7 +19542,7 @@
                                           </p:stCondLst>
                                         </p:cTn>
                                         <p:tgtEl>
-                                          <p:spTgt spid="1573993130"/>
+                                          <p:spTgt spid="1422491601"/>
                                         </p:tgtEl>
                                         <p:attrNameLst>
                                           <p:attrName>style.visibility</p:attrName>
@@ -19556,7 +19556,7 @@
                                       <p:cBhvr>
                                         <p:cTn id="11" dur="500"/>
                                         <p:tgtEl>
-                                          <p:spTgt spid="1573993130"/>
+                                          <p:spTgt spid="1422491601"/>
                                         </p:tgtEl>
                                       </p:cBhvr>
                                     </p:animEffect>
@@ -19591,7 +19591,7 @@
                                       <p:cBhvr>
                                         <p:cTn id="6" dur="500"/>
                                         <p:tgtEl>
-                                          <p:spTgt spid="1573993130"/>
+                                          <p:spTgt spid="1422491601"/>
                                         </p:tgtEl>
                                       </p:cBhvr>
                                     </p:animEffect>
@@ -19603,7 +19603,7 @@
                                           </p:stCondLst>
                                         </p:cTn>
                                         <p:tgtEl>
-                                          <p:spTgt spid="1573993130"/>
+                                          <p:spTgt spid="1422491601"/>
                                         </p:tgtEl>
                                         <p:attrNameLst>
                                           <p:attrName>style.visibility</p:attrName>
@@ -19674,7 +19674,7 @@
       </p:grpSpPr>
       <p:sp>
         <p:nvSpPr>
-          <p:cNvPr id="271554779" name="Rectangle 1407440435"/>
+          <p:cNvPr id="1764974492" name="Rectangle 1407440435"/>
           <p:cNvSpPr/>
           <p:nvPr/>
         </p:nvSpPr>
@@ -19730,7 +19730,7 @@
       </p:sp>
       <p:pic>
         <p:nvPicPr>
-          <p:cNvPr id="1382963073" name=""/>
+          <p:cNvPr id="1877013223" name=""/>
           <p:cNvPicPr>
             <a:picLocks noChangeAspect="1"/>
           </p:cNvPicPr>
@@ -19752,7 +19752,7 @@
       </p:pic>
       <p:sp>
         <p:nvSpPr>
-          <p:cNvPr id="327957007" name=""/>
+          <p:cNvPr id="1114958719" name=""/>
           <p:cNvSpPr txBox="1"/>
           <p:nvPr/>
         </p:nvSpPr>
@@ -19808,7 +19808,7 @@
       </p:sp>
       <p:sp>
         <p:nvSpPr>
-          <p:cNvPr id="1418079080" name=""/>
+          <p:cNvPr id="653796136" name=""/>
           <p:cNvSpPr txBox="1"/>
           <p:nvPr/>
         </p:nvSpPr>
@@ -19864,7 +19864,7 @@
       </p:sp>
       <p:sp>
         <p:nvSpPr>
-          <p:cNvPr id="1621936093" name=""/>
+          <p:cNvPr id="1043302726" name=""/>
           <p:cNvSpPr txBox="1"/>
           <p:nvPr/>
         </p:nvSpPr>
@@ -19920,7 +19920,7 @@
       </p:sp>
       <p:grpSp>
         <p:nvGrpSpPr>
-          <p:cNvPr id="1930378002" name=""/>
+          <p:cNvPr id="527612131" name=""/>
           <p:cNvGrpSpPr/>
           <p:nvPr/>
         </p:nvGrpSpPr>
@@ -20039,7 +20039,7 @@
       </p:grpSp>
       <p:grpSp>
         <p:nvGrpSpPr>
-          <p:cNvPr id="1196676080" name=""/>
+          <p:cNvPr id="982228605" name=""/>
           <p:cNvGrpSpPr/>
           <p:nvPr/>
         </p:nvGrpSpPr>
@@ -20161,7 +20161,7 @@
       </p:grpSp>
       <p:grpSp>
         <p:nvGrpSpPr>
-          <p:cNvPr id="992628074" name=""/>
+          <p:cNvPr id="1993450580" name=""/>
           <p:cNvGrpSpPr/>
           <p:nvPr/>
         </p:nvGrpSpPr>
@@ -20280,7 +20280,7 @@
       </p:grpSp>
       <p:grpSp>
         <p:nvGrpSpPr>
-          <p:cNvPr id="849924664" name=""/>
+          <p:cNvPr id="630866669" name=""/>
           <p:cNvGrpSpPr/>
           <p:nvPr/>
         </p:nvGrpSpPr>
@@ -20399,7 +20399,7 @@
       </p:grpSp>
       <p:grpSp>
         <p:nvGrpSpPr>
-          <p:cNvPr id="1502123561" name=""/>
+          <p:cNvPr id="417294829" name=""/>
           <p:cNvGrpSpPr/>
           <p:nvPr/>
         </p:nvGrpSpPr>
@@ -20518,7 +20518,7 @@
       </p:grpSp>
       <p:sp>
         <p:nvSpPr>
-          <p:cNvPr id="1768851796" name=""/>
+          <p:cNvPr id="1593650684" name=""/>
           <p:cNvSpPr txBox="1"/>
           <p:nvPr/>
         </p:nvSpPr>
@@ -20563,7 +20563,7 @@
       </p:sp>
       <p:sp>
         <p:nvSpPr>
-          <p:cNvPr id="1190658391" name=""/>
+          <p:cNvPr id="1879944302" name=""/>
           <p:cNvSpPr txBox="1"/>
           <p:nvPr/>
         </p:nvSpPr>
@@ -20614,7 +20614,7 @@
       </p:sp>
       <p:sp>
         <p:nvSpPr>
-          <p:cNvPr id="112761387" name=""/>
+          <p:cNvPr id="1717226816" name=""/>
           <p:cNvSpPr txBox="1"/>
           <p:nvPr/>
         </p:nvSpPr>
@@ -20659,7 +20659,7 @@
       </p:sp>
       <p:sp>
         <p:nvSpPr>
-          <p:cNvPr id="1841577722" name=""/>
+          <p:cNvPr id="1425533181" name=""/>
           <p:cNvSpPr txBox="1"/>
           <p:nvPr/>
         </p:nvSpPr>
@@ -20704,7 +20704,7 @@
       </p:sp>
       <p:sp>
         <p:nvSpPr>
-          <p:cNvPr id="1067831189" name=""/>
+          <p:cNvPr id="1585884635" name=""/>
           <p:cNvSpPr txBox="1"/>
           <p:nvPr/>
         </p:nvSpPr>
@@ -20797,7 +20797,7 @@
                                           </p:stCondLst>
                                         </p:cTn>
                                         <p:tgtEl>
-                                          <p:spTgt spid="1930378002"/>
+                                          <p:spTgt spid="527612131"/>
                                         </p:tgtEl>
                                         <p:attrNameLst>
                                           <p:attrName>style.visibility</p:attrName>
@@ -20811,7 +20811,7 @@
                                       <p:cBhvr additive="base">
                                         <p:cTn id="43" dur="500" fill="hold"/>
                                         <p:tgtEl>
-                                          <p:spTgt spid="1930378002"/>
+                                          <p:spTgt spid="527612131"/>
                                         </p:tgtEl>
                                         <p:attrNameLst>
                                           <p:attrName>ppt_x</p:attrName>
@@ -20834,7 +20834,7 @@
                                       <p:cBhvr additive="base">
                                         <p:cTn id="42" dur="500" fill="hold"/>
                                         <p:tgtEl>
-                                          <p:spTgt spid="1930378002"/>
+                                          <p:spTgt spid="527612131"/>
                                         </p:tgtEl>
                                         <p:attrNameLst>
                                           <p:attrName>ppt_y</p:attrName>
@@ -20870,7 +20870,7 @@
                                           </p:stCondLst>
                                         </p:cTn>
                                         <p:tgtEl>
-                                          <p:spTgt spid="1768851796"/>
+                                          <p:spTgt spid="1593650684"/>
                                         </p:tgtEl>
                                         <p:attrNameLst>
                                           <p:attrName>style.visibility</p:attrName>
@@ -20884,7 +20884,7 @@
                                       <p:cBhvr additive="base">
                                         <p:cTn id="39" dur="500" fill="hold"/>
                                         <p:tgtEl>
-                                          <p:spTgt spid="1768851796"/>
+                                          <p:spTgt spid="1593650684"/>
                                         </p:tgtEl>
                                         <p:attrNameLst>
                                           <p:attrName>ppt_x</p:attrName>
@@ -20907,7 +20907,7 @@
                                       <p:cBhvr additive="base">
                                         <p:cTn id="38" dur="500" fill="hold"/>
                                         <p:tgtEl>
-                                          <p:spTgt spid="1768851796"/>
+                                          <p:spTgt spid="1593650684"/>
                                         </p:tgtEl>
                                         <p:attrNameLst>
                                           <p:attrName>ppt_y</p:attrName>
@@ -20943,7 +20943,7 @@
                                           </p:stCondLst>
                                         </p:cTn>
                                         <p:tgtEl>
-                                          <p:spTgt spid="992628074"/>
+                                          <p:spTgt spid="1993450580"/>
                                         </p:tgtEl>
                                         <p:attrNameLst>
                                           <p:attrName>style.visibility</p:attrName>
@@ -20957,7 +20957,7 @@
                                       <p:cBhvr additive="base">
                                         <p:cTn id="35" dur="500" fill="hold"/>
                                         <p:tgtEl>
-                                          <p:spTgt spid="992628074"/>
+                                          <p:spTgt spid="1993450580"/>
                                         </p:tgtEl>
                                         <p:attrNameLst>
                                           <p:attrName>ppt_x</p:attrName>
@@ -20980,7 +20980,7 @@
                                       <p:cBhvr additive="base">
                                         <p:cTn id="34" dur="500" fill="hold"/>
                                         <p:tgtEl>
-                                          <p:spTgt spid="992628074"/>
+                                          <p:spTgt spid="1993450580"/>
                                         </p:tgtEl>
                                         <p:attrNameLst>
                                           <p:attrName>ppt_y</p:attrName>
@@ -21016,7 +21016,7 @@
                                           </p:stCondLst>
                                         </p:cTn>
                                         <p:tgtEl>
-                                          <p:spTgt spid="112761387"/>
+                                          <p:spTgt spid="1717226816"/>
                                         </p:tgtEl>
                                         <p:attrNameLst>
                                           <p:attrName>style.visibility</p:attrName>
@@ -21030,7 +21030,7 @@
                                       <p:cBhvr additive="base">
                                         <p:cTn id="31" dur="500" fill="hold"/>
                                         <p:tgtEl>
-                                          <p:spTgt spid="112761387"/>
+                                          <p:spTgt spid="1717226816"/>
                                         </p:tgtEl>
                                         <p:attrNameLst>
                                           <p:attrName>ppt_x</p:attrName>
@@ -21053,7 +21053,7 @@
                                       <p:cBhvr additive="base">
                                         <p:cTn id="30" dur="500" fill="hold"/>
                                         <p:tgtEl>
-                                          <p:spTgt spid="112761387"/>
+                                          <p:spTgt spid="1717226816"/>
                                         </p:tgtEl>
                                         <p:attrNameLst>
                                           <p:attrName>ppt_y</p:attrName>
@@ -21089,7 +21089,7 @@
                                           </p:stCondLst>
                                         </p:cTn>
                                         <p:tgtEl>
-                                          <p:spTgt spid="1502123561"/>
+                                          <p:spTgt spid="417294829"/>
                                         </p:tgtEl>
                                         <p:attrNameLst>
                                           <p:attrName>style.visibility</p:attrName>
@@ -21103,7 +21103,7 @@
                                       <p:cBhvr additive="base">
                                         <p:cTn id="27" dur="500" fill="hold"/>
                                         <p:tgtEl>
-                                          <p:spTgt spid="1502123561"/>
+                                          <p:spTgt spid="417294829"/>
                                         </p:tgtEl>
                                         <p:attrNameLst>
                                           <p:attrName>ppt_x</p:attrName>
@@ -21126,7 +21126,7 @@
                                       <p:cBhvr additive="base">
                                         <p:cTn id="26" dur="500" fill="hold"/>
                                         <p:tgtEl>
-                                          <p:spTgt spid="1502123561"/>
+                                          <p:spTgt spid="417294829"/>
                                         </p:tgtEl>
                                         <p:attrNameLst>
                                           <p:attrName>ppt_y</p:attrName>
@@ -21162,7 +21162,7 @@
                                           </p:stCondLst>
                                         </p:cTn>
                                         <p:tgtEl>
-                                          <p:spTgt spid="1067831189"/>
+                                          <p:spTgt spid="1585884635"/>
                                         </p:tgtEl>
                                         <p:attrNameLst>
                                           <p:attrName>style.visibility</p:attrName>
@@ -21176,7 +21176,7 @@
                                       <p:cBhvr additive="base">
                                         <p:cTn id="23" dur="500" fill="hold"/>
                                         <p:tgtEl>
-                                          <p:spTgt spid="1067831189"/>
+                                          <p:spTgt spid="1585884635"/>
                                         </p:tgtEl>
                                         <p:attrNameLst>
                                           <p:attrName>ppt_x</p:attrName>
@@ -21199,7 +21199,7 @@
                                       <p:cBhvr additive="base">
                                         <p:cTn id="22" dur="500" fill="hold"/>
                                         <p:tgtEl>
-                                          <p:spTgt spid="1067831189"/>
+                                          <p:spTgt spid="1585884635"/>
                                         </p:tgtEl>
                                         <p:attrNameLst>
                                           <p:attrName>ppt_y</p:attrName>
@@ -21235,7 +21235,7 @@
                                           </p:stCondLst>
                                         </p:cTn>
                                         <p:tgtEl>
-                                          <p:spTgt spid="1190658391"/>
+                                          <p:spTgt spid="1879944302"/>
                                         </p:tgtEl>
                                         <p:attrNameLst>
                                           <p:attrName>style.visibility</p:attrName>
@@ -21249,7 +21249,7 @@
                                       <p:cBhvr additive="base">
                                         <p:cTn id="19" dur="500" fill="hold"/>
                                         <p:tgtEl>
-                                          <p:spTgt spid="1190658391"/>
+                                          <p:spTgt spid="1879944302"/>
                                         </p:tgtEl>
                                         <p:attrNameLst>
                                           <p:attrName>ppt_x</p:attrName>
@@ -21272,7 +21272,7 @@
                                       <p:cBhvr additive="base">
                                         <p:cTn id="18" dur="500" fill="hold"/>
                                         <p:tgtEl>
-                                          <p:spTgt spid="1190658391"/>
+                                          <p:spTgt spid="1879944302"/>
                                         </p:tgtEl>
                                         <p:attrNameLst>
                                           <p:attrName>ppt_y</p:attrName>
@@ -21308,7 +21308,7 @@
                                           </p:stCondLst>
                                         </p:cTn>
                                         <p:tgtEl>
-                                          <p:spTgt spid="1196676080"/>
+                                          <p:spTgt spid="982228605"/>
                                         </p:tgtEl>
                                         <p:attrNameLst>
                                           <p:attrName>style.visibility</p:attrName>
@@ -21322,7 +21322,7 @@
                                       <p:cBhvr additive="base">
                                         <p:cTn id="15" dur="500" fill="hold"/>
                                         <p:tgtEl>
-                                          <p:spTgt spid="1196676080"/>
+                                          <p:spTgt spid="982228605"/>
                                         </p:tgtEl>
                                         <p:attrNameLst>
                                           <p:attrName>ppt_x</p:attrName>
@@ -21345,7 +21345,7 @@
                                       <p:cBhvr additive="base">
                                         <p:cTn id="14" dur="500" fill="hold"/>
                                         <p:tgtEl>
-                                          <p:spTgt spid="1196676080"/>
+                                          <p:spTgt spid="982228605"/>
                                         </p:tgtEl>
                                         <p:attrNameLst>
                                           <p:attrName>ppt_y</p:attrName>
@@ -21381,7 +21381,7 @@
                                           </p:stCondLst>
                                         </p:cTn>
                                         <p:tgtEl>
-                                          <p:spTgt spid="1841577722"/>
+                                          <p:spTgt spid="1425533181"/>
                                         </p:tgtEl>
                                         <p:attrNameLst>
                                           <p:attrName>style.visibility</p:attrName>
@@ -21395,7 +21395,7 @@
                                       <p:cBhvr additive="base">
                                         <p:cTn id="11" dur="500" fill="hold"/>
                                         <p:tgtEl>
-                                          <p:spTgt spid="1841577722"/>
+                                          <p:spTgt spid="1425533181"/>
                                         </p:tgtEl>
                                         <p:attrNameLst>
                                           <p:attrName>ppt_x</p:attrName>
@@ -21418,7 +21418,7 @@
                                       <p:cBhvr additive="base">
                                         <p:cTn id="10" dur="500" fill="hold"/>
                                         <p:tgtEl>
-                                          <p:spTgt spid="1841577722"/>
+                                          <p:spTgt spid="1425533181"/>
                                         </p:tgtEl>
                                         <p:attrNameLst>
                                           <p:attrName>ppt_y</p:attrName>
@@ -21454,7 +21454,7 @@
                                           </p:stCondLst>
                                         </p:cTn>
                                         <p:tgtEl>
-                                          <p:spTgt spid="849924664"/>
+                                          <p:spTgt spid="630866669"/>
                                         </p:tgtEl>
                                         <p:attrNameLst>
                                           <p:attrName>style.visibility</p:attrName>
@@ -21468,7 +21468,7 @@
                                       <p:cBhvr additive="base">
                                         <p:cTn id="7" dur="500" fill="hold"/>
                                         <p:tgtEl>
-                                          <p:spTgt spid="849924664"/>
+                                          <p:spTgt spid="630866669"/>
                                         </p:tgtEl>
                                         <p:attrNameLst>
                                           <p:attrName>ppt_x</p:attrName>
@@ -21491,7 +21491,7 @@
                                       <p:cBhvr additive="base">
                                         <p:cTn id="6" dur="500" fill="hold"/>
                                         <p:tgtEl>
-                                          <p:spTgt spid="849924664"/>
+                                          <p:spTgt spid="630866669"/>
                                         </p:tgtEl>
                                         <p:attrNameLst>
                                           <p:attrName>ppt_y</p:attrName>
@@ -21571,7 +21571,7 @@
       </p:grpSpPr>
       <p:sp>
         <p:nvSpPr>
-          <p:cNvPr id="1527850628" name="Rectangle 1407440435"/>
+          <p:cNvPr id="280962929" name="Rectangle 1407440435"/>
           <p:cNvSpPr/>
           <p:nvPr/>
         </p:nvSpPr>
@@ -21627,7 +21627,7 @@
       </p:sp>
       <p:grpSp>
         <p:nvGrpSpPr>
-          <p:cNvPr id="320774173" name=""/>
+          <p:cNvPr id="783504487" name=""/>
           <p:cNvGrpSpPr/>
           <p:nvPr/>
         </p:nvGrpSpPr>
@@ -21746,7 +21746,7 @@
       </p:grpSp>
       <p:grpSp>
         <p:nvGrpSpPr>
-          <p:cNvPr id="751688151" name=""/>
+          <p:cNvPr id="1507596505" name=""/>
           <p:cNvGrpSpPr/>
           <p:nvPr/>
         </p:nvGrpSpPr>
@@ -21868,7 +21868,7 @@
       </p:grpSp>
       <p:grpSp>
         <p:nvGrpSpPr>
-          <p:cNvPr id="1957134590" name=""/>
+          <p:cNvPr id="1180986514" name=""/>
           <p:cNvGrpSpPr/>
           <p:nvPr/>
         </p:nvGrpSpPr>
@@ -21987,7 +21987,7 @@
       </p:grpSp>
       <p:grpSp>
         <p:nvGrpSpPr>
-          <p:cNvPr id="727515816" name=""/>
+          <p:cNvPr id="1671911561" name=""/>
           <p:cNvGrpSpPr/>
           <p:nvPr/>
         </p:nvGrpSpPr>
@@ -22106,7 +22106,7 @@
       </p:grpSp>
       <p:grpSp>
         <p:nvGrpSpPr>
-          <p:cNvPr id="1830485440" name=""/>
+          <p:cNvPr id="1815222708" name=""/>
           <p:cNvGrpSpPr/>
           <p:nvPr/>
         </p:nvGrpSpPr>
@@ -22225,7 +22225,7 @@
       </p:grpSp>
       <p:sp>
         <p:nvSpPr>
-          <p:cNvPr id="354881852" name=""/>
+          <p:cNvPr id="1340157704" name=""/>
           <p:cNvSpPr txBox="1"/>
           <p:nvPr/>
         </p:nvSpPr>
@@ -22270,7 +22270,7 @@
       </p:sp>
       <p:sp>
         <p:nvSpPr>
-          <p:cNvPr id="1847017121" name=""/>
+          <p:cNvPr id="1318052817" name=""/>
           <p:cNvSpPr txBox="1"/>
           <p:nvPr/>
         </p:nvSpPr>
@@ -22321,7 +22321,7 @@
       </p:sp>
       <p:sp>
         <p:nvSpPr>
-          <p:cNvPr id="991042480" name=""/>
+          <p:cNvPr id="1724101860" name=""/>
           <p:cNvSpPr txBox="1"/>
           <p:nvPr/>
         </p:nvSpPr>
@@ -22366,7 +22366,7 @@
       </p:sp>
       <p:sp>
         <p:nvSpPr>
-          <p:cNvPr id="211736967" name=""/>
+          <p:cNvPr id="988822925" name=""/>
           <p:cNvSpPr txBox="1"/>
           <p:nvPr/>
         </p:nvSpPr>
@@ -22411,7 +22411,7 @@
       </p:sp>
       <p:sp>
         <p:nvSpPr>
-          <p:cNvPr id="1735953336" name=""/>
+          <p:cNvPr id="734793049" name=""/>
           <p:cNvSpPr txBox="1"/>
           <p:nvPr/>
         </p:nvSpPr>
